--- a/presentation/Network Routing Optimization.pptx
+++ b/presentation/Network Routing Optimization.pptx
@@ -4,6 +4,9 @@
   <p:sldMasterIdLst>
     <p:sldMasterId id="2147483660" r:id="rId1"/>
   </p:sldMasterIdLst>
+  <p:notesMasterIdLst>
+    <p:notesMasterId r:id="rId16"/>
+  </p:notesMasterIdLst>
   <p:sldIdLst>
     <p:sldId id="256" r:id="rId2"/>
     <p:sldId id="260" r:id="rId3"/>
@@ -12,9 +15,13 @@
     <p:sldId id="262" r:id="rId6"/>
     <p:sldId id="263" r:id="rId7"/>
     <p:sldId id="264" r:id="rId8"/>
-    <p:sldId id="259" r:id="rId9"/>
-    <p:sldId id="266" r:id="rId10"/>
-    <p:sldId id="265" r:id="rId11"/>
+    <p:sldId id="266" r:id="rId9"/>
+    <p:sldId id="269" r:id="rId10"/>
+    <p:sldId id="270" r:id="rId11"/>
+    <p:sldId id="259" r:id="rId12"/>
+    <p:sldId id="265" r:id="rId13"/>
+    <p:sldId id="268" r:id="rId14"/>
+    <p:sldId id="267" r:id="rId15"/>
   </p:sldIdLst>
   <p:sldSz cx="12192000" cy="6858000"/>
   <p:notesSz cx="6858000" cy="9144000"/>
@@ -119,10 +126,7 @@
 <file path=ppt/revisionInfo.xml><?xml version="1.0" encoding="utf-8"?>
 <p1510:revInfo xmlns:a="http://schemas.openxmlformats.org/drawingml/2006/main" xmlns:r="http://schemas.openxmlformats.org/officeDocument/2006/relationships" xmlns:p1510="http://schemas.microsoft.com/office/powerpoint/2015/10/main">
   <p1510:revLst>
-    <p1510:client id="{5F59B531-45B7-41D6-8C94-02F0D7ABBE4A}" v="2" dt="2026-04-26T19:11:23.378"/>
-    <p1510:client id="{9BDCF021-9E2E-42C0-B82C-DD77A947F3E1}" v="594" dt="2026-04-26T22:34:45.285"/>
-    <p1510:client id="{A8C80359-C4B5-47C5-9922-F39D05524E2E}" v="863" dt="2026-04-26T22:05:03.097"/>
-    <p1510:client id="{E341C4C6-12BE-4561-A6CC-9A07148674BB}" v="573" dt="2026-04-26T20:23:12.972"/>
+    <p1510:client id="{C42251C2-4B93-44AB-8656-2BE60CBAC27D}" v="90" dt="2026-04-30T16:20:11.347"/>
   </p1510:revLst>
 </p1510:revInfo>
 </file>
@@ -2458,6 +2462,439 @@
 </dgm:styleDef>
 </file>
 
+<file path=ppt/notesMasters/notesMaster1.xml><?xml version="1.0" encoding="utf-8"?>
+<p:notesMaster xmlns:a="http://schemas.openxmlformats.org/drawingml/2006/main" xmlns:r="http://schemas.openxmlformats.org/officeDocument/2006/relationships" xmlns:p="http://schemas.openxmlformats.org/presentationml/2006/main">
+  <p:cSld>
+    <p:bg>
+      <p:bgRef idx="1001">
+        <a:schemeClr val="bg1"/>
+      </p:bgRef>
+    </p:bg>
+    <p:spTree>
+      <p:nvGrpSpPr>
+        <p:cNvPr id="1" name=""/>
+        <p:cNvGrpSpPr/>
+        <p:nvPr/>
+      </p:nvGrpSpPr>
+      <p:grpSpPr>
+        <a:xfrm>
+          <a:off x="0" y="0"/>
+          <a:ext cx="0" cy="0"/>
+          <a:chOff x="0" y="0"/>
+          <a:chExt cx="0" cy="0"/>
+        </a:xfrm>
+      </p:grpSpPr>
+      <p:sp>
+        <p:nvSpPr>
+          <p:cNvPr id="2" name="Header Placeholder 1"/>
+          <p:cNvSpPr>
+            <a:spLocks noGrp="1"/>
+          </p:cNvSpPr>
+          <p:nvPr>
+            <p:ph type="hdr" sz="quarter"/>
+          </p:nvPr>
+        </p:nvSpPr>
+        <p:spPr>
+          <a:xfrm>
+            <a:off x="0" y="0"/>
+            <a:ext cx="2971800" cy="458788"/>
+          </a:xfrm>
+          <a:prstGeom prst="rect">
+            <a:avLst/>
+          </a:prstGeom>
+        </p:spPr>
+        <p:txBody>
+          <a:bodyPr vert="horz" lIns="91440" tIns="45720" rIns="91440" bIns="45720" rtlCol="0"/>
+          <a:lstStyle>
+            <a:lvl1pPr algn="l">
+              <a:defRPr sz="1200"/>
+            </a:lvl1pPr>
+          </a:lstStyle>
+          <a:p>
+            <a:endParaRPr lang="en-US"/>
+          </a:p>
+        </p:txBody>
+      </p:sp>
+      <p:sp>
+        <p:nvSpPr>
+          <p:cNvPr id="3" name="Date Placeholder 2"/>
+          <p:cNvSpPr>
+            <a:spLocks noGrp="1"/>
+          </p:cNvSpPr>
+          <p:nvPr>
+            <p:ph type="dt" idx="1"/>
+          </p:nvPr>
+        </p:nvSpPr>
+        <p:spPr>
+          <a:xfrm>
+            <a:off x="3884613" y="0"/>
+            <a:ext cx="2971800" cy="458788"/>
+          </a:xfrm>
+          <a:prstGeom prst="rect">
+            <a:avLst/>
+          </a:prstGeom>
+        </p:spPr>
+        <p:txBody>
+          <a:bodyPr vert="horz" lIns="91440" tIns="45720" rIns="91440" bIns="45720" rtlCol="0"/>
+          <a:lstStyle>
+            <a:lvl1pPr algn="r">
+              <a:defRPr sz="1200"/>
+            </a:lvl1pPr>
+          </a:lstStyle>
+          <a:p>
+            <a:fld id="{37CF044D-ED56-4C6A-A003-885264700605}" type="datetimeFigureOut">
+              <a:t>4/30/2026</a:t>
+            </a:fld>
+            <a:endParaRPr lang="en-US"/>
+          </a:p>
+        </p:txBody>
+      </p:sp>
+      <p:sp>
+        <p:nvSpPr>
+          <p:cNvPr id="4" name="Slide Image Placeholder 3"/>
+          <p:cNvSpPr>
+            <a:spLocks noGrp="1" noRot="1" noChangeAspect="1"/>
+          </p:cNvSpPr>
+          <p:nvPr>
+            <p:ph type="sldImg" idx="2"/>
+          </p:nvPr>
+        </p:nvSpPr>
+        <p:spPr>
+          <a:xfrm>
+            <a:off x="685800" y="1143000"/>
+            <a:ext cx="5486400" cy="3086100"/>
+          </a:xfrm>
+          <a:prstGeom prst="rect">
+            <a:avLst/>
+          </a:prstGeom>
+          <a:noFill/>
+          <a:ln w="12700">
+            <a:solidFill>
+              <a:prstClr val="black"/>
+            </a:solidFill>
+          </a:ln>
+        </p:spPr>
+        <p:txBody>
+          <a:bodyPr vert="horz" lIns="91440" tIns="45720" rIns="91440" bIns="45720" rtlCol="0" anchor="ctr"/>
+          <a:lstStyle/>
+          <a:p>
+            <a:endParaRPr lang="en-US"/>
+          </a:p>
+        </p:txBody>
+      </p:sp>
+      <p:sp>
+        <p:nvSpPr>
+          <p:cNvPr id="5" name="Notes Placeholder 4"/>
+          <p:cNvSpPr>
+            <a:spLocks noGrp="1"/>
+          </p:cNvSpPr>
+          <p:nvPr>
+            <p:ph type="body" sz="quarter" idx="3"/>
+          </p:nvPr>
+        </p:nvSpPr>
+        <p:spPr>
+          <a:xfrm>
+            <a:off x="685800" y="4400550"/>
+            <a:ext cx="5486400" cy="3600450"/>
+          </a:xfrm>
+          <a:prstGeom prst="rect">
+            <a:avLst/>
+          </a:prstGeom>
+        </p:spPr>
+        <p:txBody>
+          <a:bodyPr vert="horz" lIns="91440" tIns="45720" rIns="91440" bIns="45720" rtlCol="0"/>
+          <a:lstStyle/>
+          <a:p>
+            <a:pPr lvl="0"/>
+            <a:r>
+              <a:rPr lang="en-US"/>
+              <a:t>Click to edit Master text styles</a:t>
+            </a:r>
+          </a:p>
+          <a:p>
+            <a:pPr lvl="1"/>
+            <a:r>
+              <a:rPr lang="en-US"/>
+              <a:t>Second level</a:t>
+            </a:r>
+          </a:p>
+          <a:p>
+            <a:pPr lvl="2"/>
+            <a:r>
+              <a:rPr lang="en-US"/>
+              <a:t>Third level</a:t>
+            </a:r>
+          </a:p>
+          <a:p>
+            <a:pPr lvl="3"/>
+            <a:r>
+              <a:rPr lang="en-US"/>
+              <a:t>Fourth level</a:t>
+            </a:r>
+          </a:p>
+          <a:p>
+            <a:pPr lvl="4"/>
+            <a:r>
+              <a:rPr lang="en-US"/>
+              <a:t>Fifth level</a:t>
+            </a:r>
+          </a:p>
+        </p:txBody>
+      </p:sp>
+      <p:sp>
+        <p:nvSpPr>
+          <p:cNvPr id="6" name="Footer Placeholder 5"/>
+          <p:cNvSpPr>
+            <a:spLocks noGrp="1"/>
+          </p:cNvSpPr>
+          <p:nvPr>
+            <p:ph type="ftr" sz="quarter" idx="4"/>
+          </p:nvPr>
+        </p:nvSpPr>
+        <p:spPr>
+          <a:xfrm>
+            <a:off x="0" y="8685213"/>
+            <a:ext cx="2971800" cy="458787"/>
+          </a:xfrm>
+          <a:prstGeom prst="rect">
+            <a:avLst/>
+          </a:prstGeom>
+        </p:spPr>
+        <p:txBody>
+          <a:bodyPr vert="horz" lIns="91440" tIns="45720" rIns="91440" bIns="45720" rtlCol="0" anchor="b"/>
+          <a:lstStyle>
+            <a:lvl1pPr algn="l">
+              <a:defRPr sz="1200"/>
+            </a:lvl1pPr>
+          </a:lstStyle>
+          <a:p>
+            <a:endParaRPr lang="en-US"/>
+          </a:p>
+        </p:txBody>
+      </p:sp>
+      <p:sp>
+        <p:nvSpPr>
+          <p:cNvPr id="7" name="Slide Number Placeholder 6"/>
+          <p:cNvSpPr>
+            <a:spLocks noGrp="1"/>
+          </p:cNvSpPr>
+          <p:nvPr>
+            <p:ph type="sldNum" sz="quarter" idx="5"/>
+          </p:nvPr>
+        </p:nvSpPr>
+        <p:spPr>
+          <a:xfrm>
+            <a:off x="3884613" y="8685213"/>
+            <a:ext cx="2971800" cy="458787"/>
+          </a:xfrm>
+          <a:prstGeom prst="rect">
+            <a:avLst/>
+          </a:prstGeom>
+        </p:spPr>
+        <p:txBody>
+          <a:bodyPr vert="horz" lIns="91440" tIns="45720" rIns="91440" bIns="45720" rtlCol="0" anchor="b"/>
+          <a:lstStyle>
+            <a:lvl1pPr algn="r">
+              <a:defRPr sz="1200"/>
+            </a:lvl1pPr>
+          </a:lstStyle>
+          <a:p>
+            <a:fld id="{B5A7FC6E-4C51-42D5-A0EA-5A14F07C8C77}" type="slidenum">
+              <a:t>‹#›</a:t>
+            </a:fld>
+            <a:endParaRPr lang="en-US"/>
+          </a:p>
+        </p:txBody>
+      </p:sp>
+    </p:spTree>
+    <p:extLst>
+      <p:ext uri="{BB962C8B-B14F-4D97-AF65-F5344CB8AC3E}">
+        <p14:creationId xmlns:p14="http://schemas.microsoft.com/office/powerpoint/2010/main" val="2750524363"/>
+      </p:ext>
+    </p:extLst>
+  </p:cSld>
+  <p:clrMap bg1="lt1" tx1="dk1" bg2="lt2" tx2="dk2" accent1="accent1" accent2="accent2" accent3="accent3" accent4="accent4" accent5="accent5" accent6="accent6" hlink="hlink" folHlink="folHlink"/>
+  <p:notesStyle>
+    <a:lvl1pPr marL="0" algn="l" defTabSz="914400" rtl="0" eaLnBrk="1" latinLnBrk="0" hangingPunct="1">
+      <a:defRPr sz="1200" kern="1200">
+        <a:solidFill>
+          <a:schemeClr val="tx1"/>
+        </a:solidFill>
+        <a:latin typeface="+mn-lt"/>
+        <a:ea typeface="+mn-ea"/>
+        <a:cs typeface="+mn-cs"/>
+      </a:defRPr>
+    </a:lvl1pPr>
+    <a:lvl2pPr marL="457200" algn="l" defTabSz="914400" rtl="0" eaLnBrk="1" latinLnBrk="0" hangingPunct="1">
+      <a:defRPr sz="1200" kern="1200">
+        <a:solidFill>
+          <a:schemeClr val="tx1"/>
+        </a:solidFill>
+        <a:latin typeface="+mn-lt"/>
+        <a:ea typeface="+mn-ea"/>
+        <a:cs typeface="+mn-cs"/>
+      </a:defRPr>
+    </a:lvl2pPr>
+    <a:lvl3pPr marL="914400" algn="l" defTabSz="914400" rtl="0" eaLnBrk="1" latinLnBrk="0" hangingPunct="1">
+      <a:defRPr sz="1200" kern="1200">
+        <a:solidFill>
+          <a:schemeClr val="tx1"/>
+        </a:solidFill>
+        <a:latin typeface="+mn-lt"/>
+        <a:ea typeface="+mn-ea"/>
+        <a:cs typeface="+mn-cs"/>
+      </a:defRPr>
+    </a:lvl3pPr>
+    <a:lvl4pPr marL="1371600" algn="l" defTabSz="914400" rtl="0" eaLnBrk="1" latinLnBrk="0" hangingPunct="1">
+      <a:defRPr sz="1200" kern="1200">
+        <a:solidFill>
+          <a:schemeClr val="tx1"/>
+        </a:solidFill>
+        <a:latin typeface="+mn-lt"/>
+        <a:ea typeface="+mn-ea"/>
+        <a:cs typeface="+mn-cs"/>
+      </a:defRPr>
+    </a:lvl4pPr>
+    <a:lvl5pPr marL="1828800" algn="l" defTabSz="914400" rtl="0" eaLnBrk="1" latinLnBrk="0" hangingPunct="1">
+      <a:defRPr sz="1200" kern="1200">
+        <a:solidFill>
+          <a:schemeClr val="tx1"/>
+        </a:solidFill>
+        <a:latin typeface="+mn-lt"/>
+        <a:ea typeface="+mn-ea"/>
+        <a:cs typeface="+mn-cs"/>
+      </a:defRPr>
+    </a:lvl5pPr>
+    <a:lvl6pPr marL="2286000" algn="l" defTabSz="914400" rtl="0" eaLnBrk="1" latinLnBrk="0" hangingPunct="1">
+      <a:defRPr sz="1200" kern="1200">
+        <a:solidFill>
+          <a:schemeClr val="tx1"/>
+        </a:solidFill>
+        <a:latin typeface="+mn-lt"/>
+        <a:ea typeface="+mn-ea"/>
+        <a:cs typeface="+mn-cs"/>
+      </a:defRPr>
+    </a:lvl6pPr>
+    <a:lvl7pPr marL="2743200" algn="l" defTabSz="914400" rtl="0" eaLnBrk="1" latinLnBrk="0" hangingPunct="1">
+      <a:defRPr sz="1200" kern="1200">
+        <a:solidFill>
+          <a:schemeClr val="tx1"/>
+        </a:solidFill>
+        <a:latin typeface="+mn-lt"/>
+        <a:ea typeface="+mn-ea"/>
+        <a:cs typeface="+mn-cs"/>
+      </a:defRPr>
+    </a:lvl7pPr>
+    <a:lvl8pPr marL="3200400" algn="l" defTabSz="914400" rtl="0" eaLnBrk="1" latinLnBrk="0" hangingPunct="1">
+      <a:defRPr sz="1200" kern="1200">
+        <a:solidFill>
+          <a:schemeClr val="tx1"/>
+        </a:solidFill>
+        <a:latin typeface="+mn-lt"/>
+        <a:ea typeface="+mn-ea"/>
+        <a:cs typeface="+mn-cs"/>
+      </a:defRPr>
+    </a:lvl8pPr>
+    <a:lvl9pPr marL="3657600" algn="l" defTabSz="914400" rtl="0" eaLnBrk="1" latinLnBrk="0" hangingPunct="1">
+      <a:defRPr sz="1200" kern="1200">
+        <a:solidFill>
+          <a:schemeClr val="tx1"/>
+        </a:solidFill>
+        <a:latin typeface="+mn-lt"/>
+        <a:ea typeface="+mn-ea"/>
+        <a:cs typeface="+mn-cs"/>
+      </a:defRPr>
+    </a:lvl9pPr>
+  </p:notesStyle>
+</p:notesMaster>
+</file>
+
+<file path=ppt/notesSlides/notesSlide1.xml><?xml version="1.0" encoding="utf-8"?>
+<p:notes xmlns:a="http://schemas.openxmlformats.org/drawingml/2006/main" xmlns:r="http://schemas.openxmlformats.org/officeDocument/2006/relationships" xmlns:p="http://schemas.openxmlformats.org/presentationml/2006/main">
+  <p:cSld>
+    <p:spTree>
+      <p:nvGrpSpPr>
+        <p:cNvPr id="1" name=""/>
+        <p:cNvGrpSpPr/>
+        <p:nvPr/>
+      </p:nvGrpSpPr>
+      <p:grpSpPr>
+        <a:xfrm>
+          <a:off x="0" y="0"/>
+          <a:ext cx="0" cy="0"/>
+          <a:chOff x="0" y="0"/>
+          <a:chExt cx="0" cy="0"/>
+        </a:xfrm>
+      </p:grpSpPr>
+      <p:sp>
+        <p:nvSpPr>
+          <p:cNvPr id="2" name="Slide Image Placeholder 1"/>
+          <p:cNvSpPr>
+            <a:spLocks noGrp="1" noRot="1" noChangeAspect="1"/>
+          </p:cNvSpPr>
+          <p:nvPr>
+            <p:ph type="sldImg"/>
+          </p:nvPr>
+        </p:nvSpPr>
+        <p:spPr/>
+      </p:sp>
+      <p:sp>
+        <p:nvSpPr>
+          <p:cNvPr id="3" name="Notes Placeholder 2"/>
+          <p:cNvSpPr>
+            <a:spLocks noGrp="1"/>
+          </p:cNvSpPr>
+          <p:nvPr>
+            <p:ph type="body" idx="1"/>
+          </p:nvPr>
+        </p:nvSpPr>
+        <p:spPr/>
+        <p:txBody>
+          <a:bodyPr/>
+          <a:lstStyle/>
+          <a:p>
+            <a:endParaRPr lang="en-US" dirty="0">
+              <a:ea typeface="Calibri"/>
+              <a:cs typeface="+mn-lt"/>
+            </a:endParaRPr>
+          </a:p>
+        </p:txBody>
+      </p:sp>
+      <p:sp>
+        <p:nvSpPr>
+          <p:cNvPr id="4" name="Slide Number Placeholder 3"/>
+          <p:cNvSpPr>
+            <a:spLocks noGrp="1"/>
+          </p:cNvSpPr>
+          <p:nvPr>
+            <p:ph type="sldNum" sz="quarter" idx="5"/>
+          </p:nvPr>
+        </p:nvSpPr>
+        <p:spPr/>
+        <p:txBody>
+          <a:bodyPr/>
+          <a:lstStyle/>
+          <a:p>
+            <a:fld id="{B5A7FC6E-4C51-42D5-A0EA-5A14F07C8C77}" type="slidenum">
+              <a:t>5</a:t>
+            </a:fld>
+            <a:endParaRPr lang="en-US"/>
+          </a:p>
+        </p:txBody>
+      </p:sp>
+    </p:spTree>
+    <p:extLst>
+      <p:ext uri="{BB962C8B-B14F-4D97-AF65-F5344CB8AC3E}">
+        <p14:creationId xmlns:p14="http://schemas.microsoft.com/office/powerpoint/2010/main" val="1521351124"/>
+      </p:ext>
+    </p:extLst>
+  </p:cSld>
+  <p:clrMapOvr>
+    <a:masterClrMapping/>
+  </p:clrMapOvr>
+</p:notes>
+</file>
+
 <file path=ppt/slideLayouts/slideLayout1.xml><?xml version="1.0" encoding="utf-8"?>
 <p:sldLayout xmlns:a="http://schemas.openxmlformats.org/drawingml/2006/main" xmlns:r="http://schemas.openxmlformats.org/officeDocument/2006/relationships" xmlns:p="http://schemas.openxmlformats.org/presentationml/2006/main" type="title" preserve="1">
   <p:cSld name="Title Slide">
@@ -2587,7 +3024,7 @@
           <a:p>
             <a:fld id="{846CE7D5-CF57-46EF-B807-FDD0502418D4}" type="datetimeFigureOut">
               <a:rPr lang="en-US" smtClean="0"/>
-              <a:t>4/27/2026</a:t>
+              <a:t>4/30/2026</a:t>
             </a:fld>
             <a:endParaRPr lang="en-US"/>
           </a:p>
@@ -2755,7 +3192,7 @@
           <a:p>
             <a:fld id="{846CE7D5-CF57-46EF-B807-FDD0502418D4}" type="datetimeFigureOut">
               <a:rPr lang="en-US" smtClean="0"/>
-              <a:t>4/27/2026</a:t>
+              <a:t>4/30/2026</a:t>
             </a:fld>
             <a:endParaRPr lang="en-US"/>
           </a:p>
@@ -2933,7 +3370,7 @@
           <a:p>
             <a:fld id="{846CE7D5-CF57-46EF-B807-FDD0502418D4}" type="datetimeFigureOut">
               <a:rPr lang="en-US" smtClean="0"/>
-              <a:t>4/27/2026</a:t>
+              <a:t>4/30/2026</a:t>
             </a:fld>
             <a:endParaRPr lang="en-US"/>
           </a:p>
@@ -3101,7 +3538,7 @@
           <a:p>
             <a:fld id="{846CE7D5-CF57-46EF-B807-FDD0502418D4}" type="datetimeFigureOut">
               <a:rPr lang="en-US" smtClean="0"/>
-              <a:t>4/27/2026</a:t>
+              <a:t>4/30/2026</a:t>
             </a:fld>
             <a:endParaRPr lang="en-US"/>
           </a:p>
@@ -3346,7 +3783,7 @@
           <a:p>
             <a:fld id="{846CE7D5-CF57-46EF-B807-FDD0502418D4}" type="datetimeFigureOut">
               <a:rPr lang="en-US" smtClean="0"/>
-              <a:t>4/27/2026</a:t>
+              <a:t>4/30/2026</a:t>
             </a:fld>
             <a:endParaRPr lang="en-US"/>
           </a:p>
@@ -3575,7 +4012,7 @@
           <a:p>
             <a:fld id="{846CE7D5-CF57-46EF-B807-FDD0502418D4}" type="datetimeFigureOut">
               <a:rPr lang="en-US" smtClean="0"/>
-              <a:t>4/27/2026</a:t>
+              <a:t>4/30/2026</a:t>
             </a:fld>
             <a:endParaRPr lang="en-US"/>
           </a:p>
@@ -3939,7 +4376,7 @@
           <a:p>
             <a:fld id="{846CE7D5-CF57-46EF-B807-FDD0502418D4}" type="datetimeFigureOut">
               <a:rPr lang="en-US" smtClean="0"/>
-              <a:t>4/27/2026</a:t>
+              <a:t>4/30/2026</a:t>
             </a:fld>
             <a:endParaRPr lang="en-US"/>
           </a:p>
@@ -4056,7 +4493,7 @@
           <a:p>
             <a:fld id="{846CE7D5-CF57-46EF-B807-FDD0502418D4}" type="datetimeFigureOut">
               <a:rPr lang="en-US" smtClean="0"/>
-              <a:t>4/27/2026</a:t>
+              <a:t>4/30/2026</a:t>
             </a:fld>
             <a:endParaRPr lang="en-US"/>
           </a:p>
@@ -4151,7 +4588,7 @@
           <a:p>
             <a:fld id="{846CE7D5-CF57-46EF-B807-FDD0502418D4}" type="datetimeFigureOut">
               <a:rPr lang="en-US" smtClean="0"/>
-              <a:t>4/27/2026</a:t>
+              <a:t>4/30/2026</a:t>
             </a:fld>
             <a:endParaRPr lang="en-US"/>
           </a:p>
@@ -4426,7 +4863,7 @@
           <a:p>
             <a:fld id="{846CE7D5-CF57-46EF-B807-FDD0502418D4}" type="datetimeFigureOut">
               <a:rPr lang="en-US" smtClean="0"/>
-              <a:t>4/27/2026</a:t>
+              <a:t>4/30/2026</a:t>
             </a:fld>
             <a:endParaRPr lang="en-US"/>
           </a:p>
@@ -4681,7 +5118,7 @@
           <a:p>
             <a:fld id="{846CE7D5-CF57-46EF-B807-FDD0502418D4}" type="datetimeFigureOut">
               <a:rPr lang="en-US" smtClean="0"/>
-              <a:t>4/27/2026</a:t>
+              <a:t>4/30/2026</a:t>
             </a:fld>
             <a:endParaRPr lang="en-US"/>
           </a:p>
@@ -4892,7 +5329,7 @@
           <a:p>
             <a:fld id="{846CE7D5-CF57-46EF-B807-FDD0502418D4}" type="datetimeFigureOut">
               <a:rPr lang="en-US" smtClean="0"/>
-              <a:t>4/27/2026</a:t>
+              <a:t>4/30/2026</a:t>
             </a:fld>
             <a:endParaRPr lang="en-US"/>
           </a:p>
@@ -7605,6 +8042,1042 @@
     </p:bg>
     <p:spTree>
       <p:nvGrpSpPr>
+        <p:cNvPr id="1" name="">
+          <a:extLst>
+            <a:ext uri="{FF2B5EF4-FFF2-40B4-BE49-F238E27FC236}">
+              <a16:creationId xmlns:a16="http://schemas.microsoft.com/office/drawing/2014/main" id="{F1F313E0-C4F8-3F76-7AEB-8A070028CE76}"/>
+            </a:ext>
+          </a:extLst>
+        </p:cNvPr>
+        <p:cNvGrpSpPr/>
+        <p:nvPr/>
+      </p:nvGrpSpPr>
+      <p:grpSpPr>
+        <a:xfrm>
+          <a:off x="0" y="0"/>
+          <a:ext cx="0" cy="0"/>
+          <a:chOff x="0" y="0"/>
+          <a:chExt cx="0" cy="0"/>
+        </a:xfrm>
+      </p:grpSpPr>
+      <p:sp useBgFill="1">
+        <p:nvSpPr>
+          <p:cNvPr id="53" name="Rectangle 52">
+            <a:extLst>
+              <a:ext uri="{FF2B5EF4-FFF2-40B4-BE49-F238E27FC236}">
+                <a16:creationId xmlns:a16="http://schemas.microsoft.com/office/drawing/2014/main" id="{2151139A-886F-4B97-8815-729AD3831BBD}"/>
+              </a:ext>
+              <a:ext uri="{C183D7F6-B498-43B3-948B-1728B52AA6E4}">
+                <adec:decorative xmlns:adec="http://schemas.microsoft.com/office/drawing/2017/decorative" val="1"/>
+              </a:ext>
+            </a:extLst>
+          </p:cNvPr>
+          <p:cNvSpPr>
+            <a:spLocks noGrp="1" noRot="1" noChangeAspect="1" noMove="1" noResize="1" noEditPoints="1" noAdjustHandles="1" noChangeArrowheads="1" noChangeShapeType="1" noTextEdit="1"/>
+          </p:cNvSpPr>
+          <p:nvPr>
+            <p:extLst>
+              <p:ext uri="{386F3935-93C4-4BCD-93E2-E3B085C9AB24}">
+                <p16:designElem xmlns:p16="http://schemas.microsoft.com/office/powerpoint/2015/main" val="1"/>
+              </p:ext>
+            </p:extLst>
+          </p:nvPr>
+        </p:nvSpPr>
+        <p:spPr>
+          <a:xfrm>
+            <a:off x="0" y="0"/>
+            <a:ext cx="12192000" cy="6858000"/>
+          </a:xfrm>
+          <a:prstGeom prst="rect">
+            <a:avLst/>
+          </a:prstGeom>
+          <a:ln w="12700" cap="flat" cmpd="sng" algn="ctr">
+            <a:noFill/>
+            <a:prstDash val="solid"/>
+            <a:miter lim="800000"/>
+          </a:ln>
+          <a:effectLst/>
+          <a:extLst>
+            <a:ext uri="{91240B29-F687-4F45-9708-019B960494DF}">
+              <a14:hiddenLine xmlns:a14="http://schemas.microsoft.com/office/drawing/2010/main" w="12700" cap="flat" cmpd="sng" algn="ctr">
+                <a:solidFill>
+                  <a:schemeClr val="accent1">
+                    <a:shade val="50000"/>
+                  </a:schemeClr>
+                </a:solidFill>
+                <a:prstDash val="solid"/>
+                <a:miter lim="800000"/>
+              </a14:hiddenLine>
+            </a:ext>
+          </a:extLst>
+        </p:spPr>
+        <p:style>
+          <a:lnRef idx="2">
+            <a:schemeClr val="accent1">
+              <a:shade val="50000"/>
+            </a:schemeClr>
+          </a:lnRef>
+          <a:fillRef idx="1">
+            <a:schemeClr val="accent1"/>
+          </a:fillRef>
+          <a:effectRef idx="0">
+            <a:schemeClr val="accent1"/>
+          </a:effectRef>
+          <a:fontRef idx="minor">
+            <a:schemeClr val="lt1"/>
+          </a:fontRef>
+        </p:style>
+        <p:txBody>
+          <a:bodyPr rtlCol="0" anchor="ctr"/>
+          <a:lstStyle/>
+          <a:p>
+            <a:pPr algn="ctr"/>
+            <a:endParaRPr lang="en-US" sz="2000"/>
+          </a:p>
+        </p:txBody>
+      </p:sp>
+      <p:sp>
+        <p:nvSpPr>
+          <p:cNvPr id="55" name="Rectangle 54">
+            <a:extLst>
+              <a:ext uri="{FF2B5EF4-FFF2-40B4-BE49-F238E27FC236}">
+                <a16:creationId xmlns:a16="http://schemas.microsoft.com/office/drawing/2014/main" id="{AB5E08C4-8CDD-4623-A5B8-E998C6DEE3B7}"/>
+              </a:ext>
+              <a:ext uri="{C183D7F6-B498-43B3-948B-1728B52AA6E4}">
+                <adec:decorative xmlns:adec="http://schemas.microsoft.com/office/drawing/2017/decorative" val="1"/>
+              </a:ext>
+            </a:extLst>
+          </p:cNvPr>
+          <p:cNvSpPr>
+            <a:spLocks noGrp="1" noRot="1" noChangeAspect="1" noMove="1" noResize="1" noEditPoints="1" noAdjustHandles="1" noChangeArrowheads="1" noChangeShapeType="1" noTextEdit="1"/>
+          </p:cNvSpPr>
+          <p:nvPr>
+            <p:extLst>
+              <p:ext uri="{386F3935-93C4-4BCD-93E2-E3B085C9AB24}">
+                <p16:designElem xmlns:p16="http://schemas.microsoft.com/office/powerpoint/2015/main" val="1"/>
+              </p:ext>
+            </p:extLst>
+          </p:nvPr>
+        </p:nvSpPr>
+        <p:spPr>
+          <a:xfrm flipH="1">
+            <a:off x="2" y="492"/>
+            <a:ext cx="12191998" cy="1575955"/>
+          </a:xfrm>
+          <a:prstGeom prst="rect">
+            <a:avLst/>
+          </a:prstGeom>
+          <a:gradFill>
+            <a:gsLst>
+              <a:gs pos="0">
+                <a:schemeClr val="accent1">
+                  <a:lumMod val="50000"/>
+                </a:schemeClr>
+              </a:gs>
+              <a:gs pos="100000">
+                <a:schemeClr val="accent1">
+                  <a:lumMod val="75000"/>
+                </a:schemeClr>
+              </a:gs>
+            </a:gsLst>
+            <a:lin ang="8400000" scaled="0"/>
+          </a:gradFill>
+          <a:ln>
+            <a:noFill/>
+          </a:ln>
+        </p:spPr>
+        <p:style>
+          <a:lnRef idx="2">
+            <a:schemeClr val="accent1">
+              <a:shade val="50000"/>
+            </a:schemeClr>
+          </a:lnRef>
+          <a:fillRef idx="1">
+            <a:schemeClr val="accent1"/>
+          </a:fillRef>
+          <a:effectRef idx="0">
+            <a:schemeClr val="accent1"/>
+          </a:effectRef>
+          <a:fontRef idx="minor">
+            <a:schemeClr val="lt1"/>
+          </a:fontRef>
+        </p:style>
+        <p:txBody>
+          <a:bodyPr rtlCol="0" anchor="ctr"/>
+          <a:lstStyle/>
+          <a:p>
+            <a:pPr algn="ctr"/>
+            <a:endParaRPr lang="en-US"/>
+          </a:p>
+        </p:txBody>
+      </p:sp>
+      <p:sp>
+        <p:nvSpPr>
+          <p:cNvPr id="57" name="Rectangle 56">
+            <a:extLst>
+              <a:ext uri="{FF2B5EF4-FFF2-40B4-BE49-F238E27FC236}">
+                <a16:creationId xmlns:a16="http://schemas.microsoft.com/office/drawing/2014/main" id="{15F33878-D502-4FFA-8ACE-F2AECDB2A23F}"/>
+              </a:ext>
+              <a:ext uri="{C183D7F6-B498-43B3-948B-1728B52AA6E4}">
+                <adec:decorative xmlns:adec="http://schemas.microsoft.com/office/drawing/2017/decorative" val="1"/>
+              </a:ext>
+            </a:extLst>
+          </p:cNvPr>
+          <p:cNvSpPr>
+            <a:spLocks noGrp="1" noRot="1" noChangeAspect="1" noMove="1" noResize="1" noEditPoints="1" noAdjustHandles="1" noChangeArrowheads="1" noChangeShapeType="1" noTextEdit="1"/>
+          </p:cNvSpPr>
+          <p:nvPr>
+            <p:extLst>
+              <p:ext uri="{386F3935-93C4-4BCD-93E2-E3B085C9AB24}">
+                <p16:designElem xmlns:p16="http://schemas.microsoft.com/office/powerpoint/2015/main" val="1"/>
+              </p:ext>
+            </p:extLst>
+          </p:nvPr>
+        </p:nvSpPr>
+        <p:spPr>
+          <a:xfrm rot="10800000" flipH="1">
+            <a:off x="8128857" y="35"/>
+            <a:ext cx="4063143" cy="1576412"/>
+          </a:xfrm>
+          <a:prstGeom prst="rect">
+            <a:avLst/>
+          </a:prstGeom>
+          <a:gradFill>
+            <a:gsLst>
+              <a:gs pos="19000">
+                <a:schemeClr val="accent1">
+                  <a:lumMod val="50000"/>
+                  <a:alpha val="68000"/>
+                </a:schemeClr>
+              </a:gs>
+              <a:gs pos="100000">
+                <a:schemeClr val="accent1">
+                  <a:alpha val="79000"/>
+                </a:schemeClr>
+              </a:gs>
+            </a:gsLst>
+            <a:lin ang="19200000" scaled="0"/>
+          </a:gradFill>
+          <a:ln>
+            <a:noFill/>
+          </a:ln>
+        </p:spPr>
+        <p:style>
+          <a:lnRef idx="2">
+            <a:schemeClr val="accent1">
+              <a:shade val="50000"/>
+            </a:schemeClr>
+          </a:lnRef>
+          <a:fillRef idx="1">
+            <a:schemeClr val="accent1"/>
+          </a:fillRef>
+          <a:effectRef idx="0">
+            <a:schemeClr val="accent1"/>
+          </a:effectRef>
+          <a:fontRef idx="minor">
+            <a:schemeClr val="lt1"/>
+          </a:fontRef>
+        </p:style>
+        <p:txBody>
+          <a:bodyPr rtlCol="0" anchor="ctr"/>
+          <a:lstStyle/>
+          <a:p>
+            <a:pPr algn="ctr"/>
+            <a:endParaRPr lang="en-US"/>
+          </a:p>
+        </p:txBody>
+      </p:sp>
+      <p:sp>
+        <p:nvSpPr>
+          <p:cNvPr id="59" name="Rectangle 58">
+            <a:extLst>
+              <a:ext uri="{FF2B5EF4-FFF2-40B4-BE49-F238E27FC236}">
+                <a16:creationId xmlns:a16="http://schemas.microsoft.com/office/drawing/2014/main" id="{D3539FEE-81D3-4406-802E-60B20B16F4F6}"/>
+              </a:ext>
+              <a:ext uri="{C183D7F6-B498-43B3-948B-1728B52AA6E4}">
+                <adec:decorative xmlns:adec="http://schemas.microsoft.com/office/drawing/2017/decorative" val="1"/>
+              </a:ext>
+            </a:extLst>
+          </p:cNvPr>
+          <p:cNvSpPr>
+            <a:spLocks noGrp="1" noRot="1" noChangeAspect="1" noMove="1" noResize="1" noEditPoints="1" noAdjustHandles="1" noChangeArrowheads="1" noChangeShapeType="1" noTextEdit="1"/>
+          </p:cNvSpPr>
+          <p:nvPr>
+            <p:extLst>
+              <p:ext uri="{386F3935-93C4-4BCD-93E2-E3B085C9AB24}">
+                <p16:designElem xmlns:p16="http://schemas.microsoft.com/office/powerpoint/2015/main" val="1"/>
+              </p:ext>
+            </p:extLst>
+          </p:nvPr>
+        </p:nvSpPr>
+        <p:spPr>
+          <a:xfrm rot="5400000">
+            <a:off x="5307778" y="-5307777"/>
+            <a:ext cx="1576446" cy="12192001"/>
+          </a:xfrm>
+          <a:prstGeom prst="rect">
+            <a:avLst/>
+          </a:prstGeom>
+          <a:gradFill>
+            <a:gsLst>
+              <a:gs pos="16000">
+                <a:srgbClr val="000000">
+                  <a:alpha val="0"/>
+                </a:srgbClr>
+              </a:gs>
+              <a:gs pos="99000">
+                <a:srgbClr val="000000">
+                  <a:alpha val="87000"/>
+                </a:srgbClr>
+              </a:gs>
+            </a:gsLst>
+            <a:lin ang="11400000" scaled="0"/>
+          </a:gradFill>
+          <a:ln>
+            <a:noFill/>
+          </a:ln>
+        </p:spPr>
+        <p:style>
+          <a:lnRef idx="2">
+            <a:schemeClr val="accent1">
+              <a:shade val="50000"/>
+            </a:schemeClr>
+          </a:lnRef>
+          <a:fillRef idx="1">
+            <a:schemeClr val="accent1"/>
+          </a:fillRef>
+          <a:effectRef idx="0">
+            <a:schemeClr val="accent1"/>
+          </a:effectRef>
+          <a:fontRef idx="minor">
+            <a:schemeClr val="lt1"/>
+          </a:fontRef>
+        </p:style>
+        <p:txBody>
+          <a:bodyPr rtlCol="0" anchor="ctr"/>
+          <a:lstStyle/>
+          <a:p>
+            <a:pPr algn="ctr"/>
+            <a:endParaRPr lang="en-US" dirty="0"/>
+          </a:p>
+        </p:txBody>
+      </p:sp>
+      <p:sp>
+        <p:nvSpPr>
+          <p:cNvPr id="61" name="Rectangle 60">
+            <a:extLst>
+              <a:ext uri="{FF2B5EF4-FFF2-40B4-BE49-F238E27FC236}">
+                <a16:creationId xmlns:a16="http://schemas.microsoft.com/office/drawing/2014/main" id="{DC701763-729E-462F-A5A8-E0DEFEB1E2E4}"/>
+              </a:ext>
+              <a:ext uri="{C183D7F6-B498-43B3-948B-1728B52AA6E4}">
+                <adec:decorative xmlns:adec="http://schemas.microsoft.com/office/drawing/2017/decorative" val="1"/>
+              </a:ext>
+            </a:extLst>
+          </p:cNvPr>
+          <p:cNvSpPr>
+            <a:spLocks noGrp="1" noRot="1" noChangeAspect="1" noMove="1" noResize="1" noEditPoints="1" noAdjustHandles="1" noChangeArrowheads="1" noChangeShapeType="1" noTextEdit="1"/>
+          </p:cNvSpPr>
+          <p:nvPr>
+            <p:extLst>
+              <p:ext uri="{386F3935-93C4-4BCD-93E2-E3B085C9AB24}">
+                <p16:designElem xmlns:p16="http://schemas.microsoft.com/office/powerpoint/2015/main" val="1"/>
+              </p:ext>
+            </p:extLst>
+          </p:nvPr>
+        </p:nvSpPr>
+        <p:spPr>
+          <a:xfrm>
+            <a:off x="3825434" y="986"/>
+            <a:ext cx="4303422" cy="1575461"/>
+          </a:xfrm>
+          <a:prstGeom prst="rect">
+            <a:avLst/>
+          </a:prstGeom>
+          <a:gradFill>
+            <a:gsLst>
+              <a:gs pos="0">
+                <a:schemeClr val="accent1">
+                  <a:alpha val="17000"/>
+                </a:schemeClr>
+              </a:gs>
+              <a:gs pos="74000">
+                <a:schemeClr val="accent1">
+                  <a:lumMod val="50000"/>
+                  <a:alpha val="0"/>
+                </a:schemeClr>
+              </a:gs>
+            </a:gsLst>
+            <a:lin ang="14400000" scaled="0"/>
+          </a:gradFill>
+          <a:ln>
+            <a:noFill/>
+          </a:ln>
+        </p:spPr>
+        <p:style>
+          <a:lnRef idx="2">
+            <a:schemeClr val="accent1">
+              <a:shade val="50000"/>
+            </a:schemeClr>
+          </a:lnRef>
+          <a:fillRef idx="1">
+            <a:schemeClr val="accent1"/>
+          </a:fillRef>
+          <a:effectRef idx="0">
+            <a:schemeClr val="accent1"/>
+          </a:effectRef>
+          <a:fontRef idx="minor">
+            <a:schemeClr val="lt1"/>
+          </a:fontRef>
+        </p:style>
+        <p:txBody>
+          <a:bodyPr rtlCol="0" anchor="ctr"/>
+          <a:lstStyle/>
+          <a:p>
+            <a:pPr algn="ctr"/>
+            <a:endParaRPr lang="en-US"/>
+          </a:p>
+        </p:txBody>
+      </p:sp>
+      <p:sp>
+        <p:nvSpPr>
+          <p:cNvPr id="2" name="Title 1">
+            <a:extLst>
+              <a:ext uri="{FF2B5EF4-FFF2-40B4-BE49-F238E27FC236}">
+                <a16:creationId xmlns:a16="http://schemas.microsoft.com/office/drawing/2014/main" id="{AD5D7E77-A648-22F7-8E02-8616F099177A}"/>
+              </a:ext>
+            </a:extLst>
+          </p:cNvPr>
+          <p:cNvSpPr>
+            <a:spLocks noGrp="1"/>
+          </p:cNvSpPr>
+          <p:nvPr>
+            <p:ph type="title"/>
+          </p:nvPr>
+        </p:nvSpPr>
+        <p:spPr>
+          <a:xfrm>
+            <a:off x="699714" y="353160"/>
+            <a:ext cx="7091300" cy="898581"/>
+          </a:xfrm>
+        </p:spPr>
+        <p:txBody>
+          <a:bodyPr vert="horz" lIns="91440" tIns="45720" rIns="91440" bIns="45720" rtlCol="0" anchor="ctr">
+            <a:normAutofit/>
+          </a:bodyPr>
+          <a:lstStyle/>
+          <a:p>
+            <a:r>
+              <a:rPr lang="en-US" sz="4000">
+                <a:solidFill>
+                  <a:srgbClr val="FFFFFF"/>
+                </a:solidFill>
+              </a:rPr>
+              <a:t>Large Size Runtime</a:t>
+            </a:r>
+          </a:p>
+        </p:txBody>
+      </p:sp>
+      <p:pic>
+        <p:nvPicPr>
+          <p:cNvPr id="3" name="Picture 2">
+            <a:extLst>
+              <a:ext uri="{FF2B5EF4-FFF2-40B4-BE49-F238E27FC236}">
+                <a16:creationId xmlns:a16="http://schemas.microsoft.com/office/drawing/2014/main" id="{40A1729B-D8A8-8F83-C2A6-E9CF6F4583C1}"/>
+              </a:ext>
+            </a:extLst>
+          </p:cNvPr>
+          <p:cNvPicPr>
+            <a:picLocks noChangeAspect="1"/>
+          </p:cNvPicPr>
+          <p:nvPr/>
+        </p:nvPicPr>
+        <p:blipFill>
+          <a:blip r:embed="rId2"/>
+          <a:stretch>
+            <a:fillRect/>
+          </a:stretch>
+        </p:blipFill>
+        <p:spPr>
+          <a:xfrm>
+            <a:off x="715748" y="2384364"/>
+            <a:ext cx="5131088" cy="3591761"/>
+          </a:xfrm>
+          <a:prstGeom prst="rect">
+            <a:avLst/>
+          </a:prstGeom>
+        </p:spPr>
+      </p:pic>
+      <p:pic>
+        <p:nvPicPr>
+          <p:cNvPr id="4" name="Picture 3" descr="A graph of different colored bars&#10;&#10;AI-generated content may be incorrect.">
+            <a:extLst>
+              <a:ext uri="{FF2B5EF4-FFF2-40B4-BE49-F238E27FC236}">
+                <a16:creationId xmlns:a16="http://schemas.microsoft.com/office/drawing/2014/main" id="{41476973-7232-FE95-908E-94E703672C07}"/>
+              </a:ext>
+            </a:extLst>
+          </p:cNvPr>
+          <p:cNvPicPr>
+            <a:picLocks noChangeAspect="1"/>
+          </p:cNvPicPr>
+          <p:nvPr/>
+        </p:nvPicPr>
+        <p:blipFill>
+          <a:blip r:embed="rId3"/>
+          <a:stretch>
+            <a:fillRect/>
+          </a:stretch>
+        </p:blipFill>
+        <p:spPr>
+          <a:xfrm>
+            <a:off x="6345165" y="2260504"/>
+            <a:ext cx="5131087" cy="3912452"/>
+          </a:xfrm>
+          <a:prstGeom prst="rect">
+            <a:avLst/>
+          </a:prstGeom>
+        </p:spPr>
+      </p:pic>
+    </p:spTree>
+    <p:extLst>
+      <p:ext uri="{BB962C8B-B14F-4D97-AF65-F5344CB8AC3E}">
+        <p14:creationId xmlns:p14="http://schemas.microsoft.com/office/powerpoint/2010/main" val="2457165415"/>
+      </p:ext>
+    </p:extLst>
+  </p:cSld>
+  <p:clrMapOvr>
+    <a:masterClrMapping/>
+  </p:clrMapOvr>
+</p:sld>
+</file>
+
+<file path=ppt/slides/slide11.xml><?xml version="1.0" encoding="utf-8"?>
+<p:sld xmlns:a="http://schemas.openxmlformats.org/drawingml/2006/main" xmlns:r="http://schemas.openxmlformats.org/officeDocument/2006/relationships" xmlns:p="http://schemas.openxmlformats.org/presentationml/2006/main">
+  <p:cSld>
+    <p:bg>
+      <p:bgPr>
+        <a:solidFill>
+          <a:schemeClr val="bg1"/>
+        </a:solidFill>
+        <a:effectLst/>
+      </p:bgPr>
+    </p:bg>
+    <p:spTree>
+      <p:nvGrpSpPr>
+        <p:cNvPr id="1" name=""/>
+        <p:cNvGrpSpPr/>
+        <p:nvPr/>
+      </p:nvGrpSpPr>
+      <p:grpSpPr>
+        <a:xfrm>
+          <a:off x="0" y="0"/>
+          <a:ext cx="0" cy="0"/>
+          <a:chOff x="0" y="0"/>
+          <a:chExt cx="0" cy="0"/>
+        </a:xfrm>
+      </p:grpSpPr>
+      <p:sp useBgFill="1">
+        <p:nvSpPr>
+          <p:cNvPr id="30" name="Rectangle 29">
+            <a:extLst>
+              <a:ext uri="{FF2B5EF4-FFF2-40B4-BE49-F238E27FC236}">
+                <a16:creationId xmlns:a16="http://schemas.microsoft.com/office/drawing/2014/main" id="{2151139A-886F-4B97-8815-729AD3831BBD}"/>
+              </a:ext>
+              <a:ext uri="{C183D7F6-B498-43B3-948B-1728B52AA6E4}">
+                <adec:decorative xmlns:adec="http://schemas.microsoft.com/office/drawing/2017/decorative" val="1"/>
+              </a:ext>
+            </a:extLst>
+          </p:cNvPr>
+          <p:cNvSpPr>
+            <a:spLocks noGrp="1" noRot="1" noChangeAspect="1" noMove="1" noResize="1" noEditPoints="1" noAdjustHandles="1" noChangeArrowheads="1" noChangeShapeType="1" noTextEdit="1"/>
+          </p:cNvSpPr>
+          <p:nvPr>
+            <p:extLst>
+              <p:ext uri="{386F3935-93C4-4BCD-93E2-E3B085C9AB24}">
+                <p16:designElem xmlns:p16="http://schemas.microsoft.com/office/powerpoint/2015/main" val="1"/>
+              </p:ext>
+            </p:extLst>
+          </p:nvPr>
+        </p:nvSpPr>
+        <p:spPr>
+          <a:xfrm>
+            <a:off x="0" y="0"/>
+            <a:ext cx="12192000" cy="6858000"/>
+          </a:xfrm>
+          <a:prstGeom prst="rect">
+            <a:avLst/>
+          </a:prstGeom>
+          <a:ln w="12700" cap="flat" cmpd="sng" algn="ctr">
+            <a:noFill/>
+            <a:prstDash val="solid"/>
+            <a:miter lim="800000"/>
+          </a:ln>
+          <a:effectLst/>
+          <a:extLst>
+            <a:ext uri="{91240B29-F687-4F45-9708-019B960494DF}">
+              <a14:hiddenLine xmlns:a14="http://schemas.microsoft.com/office/drawing/2010/main" w="12700" cap="flat" cmpd="sng" algn="ctr">
+                <a:solidFill>
+                  <a:schemeClr val="accent1">
+                    <a:shade val="50000"/>
+                  </a:schemeClr>
+                </a:solidFill>
+                <a:prstDash val="solid"/>
+                <a:miter lim="800000"/>
+              </a14:hiddenLine>
+            </a:ext>
+          </a:extLst>
+        </p:spPr>
+        <p:style>
+          <a:lnRef idx="2">
+            <a:schemeClr val="accent1">
+              <a:shade val="50000"/>
+            </a:schemeClr>
+          </a:lnRef>
+          <a:fillRef idx="1">
+            <a:schemeClr val="accent1"/>
+          </a:fillRef>
+          <a:effectRef idx="0">
+            <a:schemeClr val="accent1"/>
+          </a:effectRef>
+          <a:fontRef idx="minor">
+            <a:schemeClr val="lt1"/>
+          </a:fontRef>
+        </p:style>
+        <p:txBody>
+          <a:bodyPr rtlCol="0" anchor="ctr"/>
+          <a:lstStyle/>
+          <a:p>
+            <a:pPr algn="ctr"/>
+            <a:endParaRPr lang="en-US" sz="2000"/>
+          </a:p>
+        </p:txBody>
+      </p:sp>
+      <p:sp>
+        <p:nvSpPr>
+          <p:cNvPr id="32" name="Rectangle 31">
+            <a:extLst>
+              <a:ext uri="{FF2B5EF4-FFF2-40B4-BE49-F238E27FC236}">
+                <a16:creationId xmlns:a16="http://schemas.microsoft.com/office/drawing/2014/main" id="{AB5E08C4-8CDD-4623-A5B8-E998C6DEE3B7}"/>
+              </a:ext>
+              <a:ext uri="{C183D7F6-B498-43B3-948B-1728B52AA6E4}">
+                <adec:decorative xmlns:adec="http://schemas.microsoft.com/office/drawing/2017/decorative" val="1"/>
+              </a:ext>
+            </a:extLst>
+          </p:cNvPr>
+          <p:cNvSpPr>
+            <a:spLocks noGrp="1" noRot="1" noChangeAspect="1" noMove="1" noResize="1" noEditPoints="1" noAdjustHandles="1" noChangeArrowheads="1" noChangeShapeType="1" noTextEdit="1"/>
+          </p:cNvSpPr>
+          <p:nvPr>
+            <p:extLst>
+              <p:ext uri="{386F3935-93C4-4BCD-93E2-E3B085C9AB24}">
+                <p16:designElem xmlns:p16="http://schemas.microsoft.com/office/powerpoint/2015/main" val="1"/>
+              </p:ext>
+            </p:extLst>
+          </p:nvPr>
+        </p:nvSpPr>
+        <p:spPr>
+          <a:xfrm flipH="1">
+            <a:off x="2" y="492"/>
+            <a:ext cx="12191998" cy="1575955"/>
+          </a:xfrm>
+          <a:prstGeom prst="rect">
+            <a:avLst/>
+          </a:prstGeom>
+          <a:gradFill>
+            <a:gsLst>
+              <a:gs pos="0">
+                <a:schemeClr val="accent1">
+                  <a:lumMod val="50000"/>
+                </a:schemeClr>
+              </a:gs>
+              <a:gs pos="100000">
+                <a:schemeClr val="accent1">
+                  <a:lumMod val="75000"/>
+                </a:schemeClr>
+              </a:gs>
+            </a:gsLst>
+            <a:lin ang="8400000" scaled="0"/>
+          </a:gradFill>
+          <a:ln>
+            <a:noFill/>
+          </a:ln>
+        </p:spPr>
+        <p:style>
+          <a:lnRef idx="2">
+            <a:schemeClr val="accent1">
+              <a:shade val="50000"/>
+            </a:schemeClr>
+          </a:lnRef>
+          <a:fillRef idx="1">
+            <a:schemeClr val="accent1"/>
+          </a:fillRef>
+          <a:effectRef idx="0">
+            <a:schemeClr val="accent1"/>
+          </a:effectRef>
+          <a:fontRef idx="minor">
+            <a:schemeClr val="lt1"/>
+          </a:fontRef>
+        </p:style>
+        <p:txBody>
+          <a:bodyPr rtlCol="0" anchor="ctr"/>
+          <a:lstStyle/>
+          <a:p>
+            <a:pPr algn="ctr"/>
+            <a:endParaRPr lang="en-US"/>
+          </a:p>
+        </p:txBody>
+      </p:sp>
+      <p:sp>
+        <p:nvSpPr>
+          <p:cNvPr id="34" name="Rectangle 33">
+            <a:extLst>
+              <a:ext uri="{FF2B5EF4-FFF2-40B4-BE49-F238E27FC236}">
+                <a16:creationId xmlns:a16="http://schemas.microsoft.com/office/drawing/2014/main" id="{15F33878-D502-4FFA-8ACE-F2AECDB2A23F}"/>
+              </a:ext>
+              <a:ext uri="{C183D7F6-B498-43B3-948B-1728B52AA6E4}">
+                <adec:decorative xmlns:adec="http://schemas.microsoft.com/office/drawing/2017/decorative" val="1"/>
+              </a:ext>
+            </a:extLst>
+          </p:cNvPr>
+          <p:cNvSpPr>
+            <a:spLocks noGrp="1" noRot="1" noChangeAspect="1" noMove="1" noResize="1" noEditPoints="1" noAdjustHandles="1" noChangeArrowheads="1" noChangeShapeType="1" noTextEdit="1"/>
+          </p:cNvSpPr>
+          <p:nvPr>
+            <p:extLst>
+              <p:ext uri="{386F3935-93C4-4BCD-93E2-E3B085C9AB24}">
+                <p16:designElem xmlns:p16="http://schemas.microsoft.com/office/powerpoint/2015/main" val="1"/>
+              </p:ext>
+            </p:extLst>
+          </p:nvPr>
+        </p:nvSpPr>
+        <p:spPr>
+          <a:xfrm rot="10800000" flipH="1">
+            <a:off x="8128857" y="35"/>
+            <a:ext cx="4063143" cy="1576412"/>
+          </a:xfrm>
+          <a:prstGeom prst="rect">
+            <a:avLst/>
+          </a:prstGeom>
+          <a:gradFill>
+            <a:gsLst>
+              <a:gs pos="19000">
+                <a:schemeClr val="accent1">
+                  <a:lumMod val="50000"/>
+                  <a:alpha val="68000"/>
+                </a:schemeClr>
+              </a:gs>
+              <a:gs pos="100000">
+                <a:schemeClr val="accent1">
+                  <a:alpha val="79000"/>
+                </a:schemeClr>
+              </a:gs>
+            </a:gsLst>
+            <a:lin ang="19200000" scaled="0"/>
+          </a:gradFill>
+          <a:ln>
+            <a:noFill/>
+          </a:ln>
+        </p:spPr>
+        <p:style>
+          <a:lnRef idx="2">
+            <a:schemeClr val="accent1">
+              <a:shade val="50000"/>
+            </a:schemeClr>
+          </a:lnRef>
+          <a:fillRef idx="1">
+            <a:schemeClr val="accent1"/>
+          </a:fillRef>
+          <a:effectRef idx="0">
+            <a:schemeClr val="accent1"/>
+          </a:effectRef>
+          <a:fontRef idx="minor">
+            <a:schemeClr val="lt1"/>
+          </a:fontRef>
+        </p:style>
+        <p:txBody>
+          <a:bodyPr rtlCol="0" anchor="ctr"/>
+          <a:lstStyle/>
+          <a:p>
+            <a:pPr algn="ctr"/>
+            <a:endParaRPr lang="en-US"/>
+          </a:p>
+        </p:txBody>
+      </p:sp>
+      <p:sp>
+        <p:nvSpPr>
+          <p:cNvPr id="36" name="Rectangle 35">
+            <a:extLst>
+              <a:ext uri="{FF2B5EF4-FFF2-40B4-BE49-F238E27FC236}">
+                <a16:creationId xmlns:a16="http://schemas.microsoft.com/office/drawing/2014/main" id="{D3539FEE-81D3-4406-802E-60B20B16F4F6}"/>
+              </a:ext>
+              <a:ext uri="{C183D7F6-B498-43B3-948B-1728B52AA6E4}">
+                <adec:decorative xmlns:adec="http://schemas.microsoft.com/office/drawing/2017/decorative" val="1"/>
+              </a:ext>
+            </a:extLst>
+          </p:cNvPr>
+          <p:cNvSpPr>
+            <a:spLocks noGrp="1" noRot="1" noChangeAspect="1" noMove="1" noResize="1" noEditPoints="1" noAdjustHandles="1" noChangeArrowheads="1" noChangeShapeType="1" noTextEdit="1"/>
+          </p:cNvSpPr>
+          <p:nvPr>
+            <p:extLst>
+              <p:ext uri="{386F3935-93C4-4BCD-93E2-E3B085C9AB24}">
+                <p16:designElem xmlns:p16="http://schemas.microsoft.com/office/powerpoint/2015/main" val="1"/>
+              </p:ext>
+            </p:extLst>
+          </p:nvPr>
+        </p:nvSpPr>
+        <p:spPr>
+          <a:xfrm rot="5400000">
+            <a:off x="5307778" y="-5307777"/>
+            <a:ext cx="1576446" cy="12192001"/>
+          </a:xfrm>
+          <a:prstGeom prst="rect">
+            <a:avLst/>
+          </a:prstGeom>
+          <a:gradFill>
+            <a:gsLst>
+              <a:gs pos="16000">
+                <a:srgbClr val="000000">
+                  <a:alpha val="0"/>
+                </a:srgbClr>
+              </a:gs>
+              <a:gs pos="99000">
+                <a:srgbClr val="000000">
+                  <a:alpha val="87000"/>
+                </a:srgbClr>
+              </a:gs>
+            </a:gsLst>
+            <a:lin ang="11400000" scaled="0"/>
+          </a:gradFill>
+          <a:ln>
+            <a:noFill/>
+          </a:ln>
+        </p:spPr>
+        <p:style>
+          <a:lnRef idx="2">
+            <a:schemeClr val="accent1">
+              <a:shade val="50000"/>
+            </a:schemeClr>
+          </a:lnRef>
+          <a:fillRef idx="1">
+            <a:schemeClr val="accent1"/>
+          </a:fillRef>
+          <a:effectRef idx="0">
+            <a:schemeClr val="accent1"/>
+          </a:effectRef>
+          <a:fontRef idx="minor">
+            <a:schemeClr val="lt1"/>
+          </a:fontRef>
+        </p:style>
+        <p:txBody>
+          <a:bodyPr rtlCol="0" anchor="ctr"/>
+          <a:lstStyle/>
+          <a:p>
+            <a:pPr algn="ctr"/>
+            <a:endParaRPr lang="en-US" dirty="0"/>
+          </a:p>
+        </p:txBody>
+      </p:sp>
+      <p:sp>
+        <p:nvSpPr>
+          <p:cNvPr id="38" name="Rectangle 37">
+            <a:extLst>
+              <a:ext uri="{FF2B5EF4-FFF2-40B4-BE49-F238E27FC236}">
+                <a16:creationId xmlns:a16="http://schemas.microsoft.com/office/drawing/2014/main" id="{DC701763-729E-462F-A5A8-E0DEFEB1E2E4}"/>
+              </a:ext>
+              <a:ext uri="{C183D7F6-B498-43B3-948B-1728B52AA6E4}">
+                <adec:decorative xmlns:adec="http://schemas.microsoft.com/office/drawing/2017/decorative" val="1"/>
+              </a:ext>
+            </a:extLst>
+          </p:cNvPr>
+          <p:cNvSpPr>
+            <a:spLocks noGrp="1" noRot="1" noChangeAspect="1" noMove="1" noResize="1" noEditPoints="1" noAdjustHandles="1" noChangeArrowheads="1" noChangeShapeType="1" noTextEdit="1"/>
+          </p:cNvSpPr>
+          <p:nvPr>
+            <p:extLst>
+              <p:ext uri="{386F3935-93C4-4BCD-93E2-E3B085C9AB24}">
+                <p16:designElem xmlns:p16="http://schemas.microsoft.com/office/powerpoint/2015/main" val="1"/>
+              </p:ext>
+            </p:extLst>
+          </p:nvPr>
+        </p:nvSpPr>
+        <p:spPr>
+          <a:xfrm>
+            <a:off x="3825434" y="986"/>
+            <a:ext cx="4303422" cy="1575461"/>
+          </a:xfrm>
+          <a:prstGeom prst="rect">
+            <a:avLst/>
+          </a:prstGeom>
+          <a:gradFill>
+            <a:gsLst>
+              <a:gs pos="0">
+                <a:schemeClr val="accent1">
+                  <a:alpha val="17000"/>
+                </a:schemeClr>
+              </a:gs>
+              <a:gs pos="74000">
+                <a:schemeClr val="accent1">
+                  <a:lumMod val="50000"/>
+                  <a:alpha val="0"/>
+                </a:schemeClr>
+              </a:gs>
+            </a:gsLst>
+            <a:lin ang="14400000" scaled="0"/>
+          </a:gradFill>
+          <a:ln>
+            <a:noFill/>
+          </a:ln>
+        </p:spPr>
+        <p:style>
+          <a:lnRef idx="2">
+            <a:schemeClr val="accent1">
+              <a:shade val="50000"/>
+            </a:schemeClr>
+          </a:lnRef>
+          <a:fillRef idx="1">
+            <a:schemeClr val="accent1"/>
+          </a:fillRef>
+          <a:effectRef idx="0">
+            <a:schemeClr val="accent1"/>
+          </a:effectRef>
+          <a:fontRef idx="minor">
+            <a:schemeClr val="lt1"/>
+          </a:fontRef>
+        </p:style>
+        <p:txBody>
+          <a:bodyPr rtlCol="0" anchor="ctr"/>
+          <a:lstStyle/>
+          <a:p>
+            <a:pPr algn="ctr"/>
+            <a:endParaRPr lang="en-US"/>
+          </a:p>
+        </p:txBody>
+      </p:sp>
+      <p:sp>
+        <p:nvSpPr>
+          <p:cNvPr id="2" name="Title 1">
+            <a:extLst>
+              <a:ext uri="{FF2B5EF4-FFF2-40B4-BE49-F238E27FC236}">
+                <a16:creationId xmlns:a16="http://schemas.microsoft.com/office/drawing/2014/main" id="{439345D5-4422-8526-1FDD-46D06345E8A7}"/>
+              </a:ext>
+            </a:extLst>
+          </p:cNvPr>
+          <p:cNvSpPr>
+            <a:spLocks noGrp="1"/>
+          </p:cNvSpPr>
+          <p:nvPr>
+            <p:ph type="title"/>
+          </p:nvPr>
+        </p:nvSpPr>
+        <p:spPr>
+          <a:xfrm>
+            <a:off x="699714" y="353160"/>
+            <a:ext cx="7091300" cy="898581"/>
+          </a:xfrm>
+        </p:spPr>
+        <p:txBody>
+          <a:bodyPr vert="horz" lIns="91440" tIns="45720" rIns="91440" bIns="45720" rtlCol="0" anchor="ctr">
+            <a:normAutofit/>
+          </a:bodyPr>
+          <a:lstStyle/>
+          <a:p>
+            <a:r>
+              <a:rPr lang="en-US" sz="4000">
+                <a:solidFill>
+                  <a:srgbClr val="FFFFFF"/>
+                </a:solidFill>
+              </a:rPr>
+              <a:t>Average Runtime</a:t>
+            </a:r>
+          </a:p>
+        </p:txBody>
+      </p:sp>
+      <p:pic>
+        <p:nvPicPr>
+          <p:cNvPr id="8" name="Picture 7" descr="A graph with numbers and lines&#10;&#10;AI-generated content may be incorrect.">
+            <a:extLst>
+              <a:ext uri="{FF2B5EF4-FFF2-40B4-BE49-F238E27FC236}">
+                <a16:creationId xmlns:a16="http://schemas.microsoft.com/office/drawing/2014/main" id="{6EA5A633-92D7-9061-F00D-5BCFAE4390F5}"/>
+              </a:ext>
+            </a:extLst>
+          </p:cNvPr>
+          <p:cNvPicPr>
+            <a:picLocks noChangeAspect="1"/>
+          </p:cNvPicPr>
+          <p:nvPr/>
+        </p:nvPicPr>
+        <p:blipFill>
+          <a:blip r:embed="rId2"/>
+          <a:stretch>
+            <a:fillRect/>
+          </a:stretch>
+        </p:blipFill>
+        <p:spPr>
+          <a:xfrm>
+            <a:off x="715748" y="2256086"/>
+            <a:ext cx="5131088" cy="3848316"/>
+          </a:xfrm>
+          <a:prstGeom prst="rect">
+            <a:avLst/>
+          </a:prstGeom>
+        </p:spPr>
+      </p:pic>
+      <p:pic>
+        <p:nvPicPr>
+          <p:cNvPr id="7" name="Picture 6" descr="A graph with a line&#10;&#10;AI-generated content may be incorrect.">
+            <a:extLst>
+              <a:ext uri="{FF2B5EF4-FFF2-40B4-BE49-F238E27FC236}">
+                <a16:creationId xmlns:a16="http://schemas.microsoft.com/office/drawing/2014/main" id="{E4E0A1B8-A84B-2816-6BE2-8995DBF9CB3F}"/>
+              </a:ext>
+            </a:extLst>
+          </p:cNvPr>
+          <p:cNvPicPr>
+            <a:picLocks noChangeAspect="1"/>
+          </p:cNvPicPr>
+          <p:nvPr/>
+        </p:nvPicPr>
+        <p:blipFill>
+          <a:blip r:embed="rId3"/>
+          <a:stretch>
+            <a:fillRect/>
+          </a:stretch>
+        </p:blipFill>
+        <p:spPr>
+          <a:xfrm>
+            <a:off x="6345165" y="2292573"/>
+            <a:ext cx="5131087" cy="3848315"/>
+          </a:xfrm>
+          <a:prstGeom prst="rect">
+            <a:avLst/>
+          </a:prstGeom>
+        </p:spPr>
+      </p:pic>
+    </p:spTree>
+    <p:extLst>
+      <p:ext uri="{BB962C8B-B14F-4D97-AF65-F5344CB8AC3E}">
+        <p14:creationId xmlns:p14="http://schemas.microsoft.com/office/powerpoint/2010/main" val="2679537060"/>
+      </p:ext>
+    </p:extLst>
+  </p:cSld>
+  <p:clrMapOvr>
+    <a:masterClrMapping/>
+  </p:clrMapOvr>
+</p:sld>
+</file>
+
+<file path=ppt/slides/slide12.xml><?xml version="1.0" encoding="utf-8"?>
+<p:sld xmlns:a="http://schemas.openxmlformats.org/drawingml/2006/main" xmlns:r="http://schemas.openxmlformats.org/officeDocument/2006/relationships" xmlns:p="http://schemas.openxmlformats.org/presentationml/2006/main">
+  <p:cSld>
+    <p:bg>
+      <p:bgPr>
+        <a:solidFill>
+          <a:schemeClr val="bg1"/>
+        </a:solidFill>
+        <a:effectLst/>
+      </p:bgPr>
+    </p:bg>
+    <p:spTree>
+      <p:nvGrpSpPr>
         <p:cNvPr id="1" name=""/>
         <p:cNvGrpSpPr/>
         <p:nvPr/>
@@ -8238,6 +9711,1015 @@
     <p:extLst>
       <p:ext uri="{BB962C8B-B14F-4D97-AF65-F5344CB8AC3E}">
         <p14:creationId xmlns:p14="http://schemas.microsoft.com/office/powerpoint/2010/main" val="2693640545"/>
+      </p:ext>
+    </p:extLst>
+  </p:cSld>
+  <p:clrMapOvr>
+    <a:masterClrMapping/>
+  </p:clrMapOvr>
+</p:sld>
+</file>
+
+<file path=ppt/slides/slide13.xml><?xml version="1.0" encoding="utf-8"?>
+<p:sld xmlns:a="http://schemas.openxmlformats.org/drawingml/2006/main" xmlns:r="http://schemas.openxmlformats.org/officeDocument/2006/relationships" xmlns:p="http://schemas.openxmlformats.org/presentationml/2006/main">
+  <p:cSld>
+    <p:bg>
+      <p:bgPr>
+        <a:solidFill>
+          <a:schemeClr val="bg1"/>
+        </a:solidFill>
+        <a:effectLst/>
+      </p:bgPr>
+    </p:bg>
+    <p:spTree>
+      <p:nvGrpSpPr>
+        <p:cNvPr id="1" name=""/>
+        <p:cNvGrpSpPr/>
+        <p:nvPr/>
+      </p:nvGrpSpPr>
+      <p:grpSpPr>
+        <a:xfrm>
+          <a:off x="0" y="0"/>
+          <a:ext cx="0" cy="0"/>
+          <a:chOff x="0" y="0"/>
+          <a:chExt cx="0" cy="0"/>
+        </a:xfrm>
+      </p:grpSpPr>
+      <p:sp useBgFill="1">
+        <p:nvSpPr>
+          <p:cNvPr id="8" name="Rectangle 7">
+            <a:extLst>
+              <a:ext uri="{FF2B5EF4-FFF2-40B4-BE49-F238E27FC236}">
+                <a16:creationId xmlns:a16="http://schemas.microsoft.com/office/drawing/2014/main" id="{907EF6B7-1338-4443-8C46-6A318D952DFD}"/>
+              </a:ext>
+              <a:ext uri="{C183D7F6-B498-43B3-948B-1728B52AA6E4}">
+                <adec:decorative xmlns:adec="http://schemas.microsoft.com/office/drawing/2017/decorative" val="1"/>
+              </a:ext>
+            </a:extLst>
+          </p:cNvPr>
+          <p:cNvSpPr>
+            <a:spLocks noGrp="1" noRot="1" noChangeAspect="1" noMove="1" noResize="1" noEditPoints="1" noAdjustHandles="1" noChangeArrowheads="1" noChangeShapeType="1" noTextEdit="1"/>
+          </p:cNvSpPr>
+          <p:nvPr>
+            <p:extLst>
+              <p:ext uri="{386F3935-93C4-4BCD-93E2-E3B085C9AB24}">
+                <p16:designElem xmlns:p16="http://schemas.microsoft.com/office/powerpoint/2015/main" val="1"/>
+              </p:ext>
+            </p:extLst>
+          </p:nvPr>
+        </p:nvSpPr>
+        <p:spPr>
+          <a:xfrm>
+            <a:off x="3048" y="0"/>
+            <a:ext cx="12188952" cy="6858000"/>
+          </a:xfrm>
+          <a:prstGeom prst="rect">
+            <a:avLst/>
+          </a:prstGeom>
+          <a:ln>
+            <a:noFill/>
+          </a:ln>
+        </p:spPr>
+        <p:style>
+          <a:lnRef idx="2">
+            <a:schemeClr val="accent1">
+              <a:shade val="50000"/>
+            </a:schemeClr>
+          </a:lnRef>
+          <a:fillRef idx="1">
+            <a:schemeClr val="accent1"/>
+          </a:fillRef>
+          <a:effectRef idx="0">
+            <a:schemeClr val="accent1"/>
+          </a:effectRef>
+          <a:fontRef idx="minor">
+            <a:schemeClr val="lt1"/>
+          </a:fontRef>
+        </p:style>
+        <p:txBody>
+          <a:bodyPr rtlCol="0" anchor="ctr"/>
+          <a:lstStyle/>
+          <a:p>
+            <a:pPr algn="ctr"/>
+            <a:endParaRPr lang="en-US"/>
+          </a:p>
+        </p:txBody>
+      </p:sp>
+      <p:sp>
+        <p:nvSpPr>
+          <p:cNvPr id="10" name="Freeform: Shape 9">
+            <a:extLst>
+              <a:ext uri="{FF2B5EF4-FFF2-40B4-BE49-F238E27FC236}">
+                <a16:creationId xmlns:a16="http://schemas.microsoft.com/office/drawing/2014/main" id="{DAAE4CDD-124C-4DCF-9584-B6033B545DD5}"/>
+              </a:ext>
+              <a:ext uri="{C183D7F6-B498-43B3-948B-1728B52AA6E4}">
+                <adec:decorative xmlns:adec="http://schemas.microsoft.com/office/drawing/2017/decorative" val="1"/>
+              </a:ext>
+            </a:extLst>
+          </p:cNvPr>
+          <p:cNvSpPr>
+            <a:spLocks noGrp="1" noRot="1" noChangeAspect="1" noMove="1" noResize="1" noEditPoints="1" noAdjustHandles="1" noChangeArrowheads="1" noChangeShapeType="1" noTextEdit="1"/>
+          </p:cNvSpPr>
+          <p:nvPr>
+            <p:extLst>
+              <p:ext uri="{386F3935-93C4-4BCD-93E2-E3B085C9AB24}">
+                <p16:designElem xmlns:p16="http://schemas.microsoft.com/office/powerpoint/2015/main" val="1"/>
+              </p:ext>
+            </p:extLst>
+          </p:nvPr>
+        </p:nvSpPr>
+        <p:spPr>
+          <a:xfrm>
+            <a:off x="1" y="0"/>
+            <a:ext cx="4167271" cy="6858000"/>
+          </a:xfrm>
+          <a:custGeom>
+            <a:avLst/>
+            <a:gdLst>
+              <a:gd name="connsiteX0" fmla="*/ 0 w 4167271"/>
+              <a:gd name="connsiteY0" fmla="*/ 0 h 6858000"/>
+              <a:gd name="connsiteX1" fmla="*/ 2259550 w 4167271"/>
+              <a:gd name="connsiteY1" fmla="*/ 0 h 6858000"/>
+              <a:gd name="connsiteX2" fmla="*/ 2387803 w 4167271"/>
+              <a:gd name="connsiteY2" fmla="*/ 82222 h 6858000"/>
+              <a:gd name="connsiteX3" fmla="*/ 4167271 w 4167271"/>
+              <a:gd name="connsiteY3" fmla="*/ 3429000 h 6858000"/>
+              <a:gd name="connsiteX4" fmla="*/ 2387803 w 4167271"/>
+              <a:gd name="connsiteY4" fmla="*/ 6775779 h 6858000"/>
+              <a:gd name="connsiteX5" fmla="*/ 2259550 w 4167271"/>
+              <a:gd name="connsiteY5" fmla="*/ 6858000 h 6858000"/>
+              <a:gd name="connsiteX6" fmla="*/ 0 w 4167271"/>
+              <a:gd name="connsiteY6" fmla="*/ 6858000 h 6858000"/>
+            </a:gdLst>
+            <a:ahLst/>
+            <a:cxnLst>
+              <a:cxn ang="0">
+                <a:pos x="connsiteX0" y="connsiteY0"/>
+              </a:cxn>
+              <a:cxn ang="0">
+                <a:pos x="connsiteX1" y="connsiteY1"/>
+              </a:cxn>
+              <a:cxn ang="0">
+                <a:pos x="connsiteX2" y="connsiteY2"/>
+              </a:cxn>
+              <a:cxn ang="0">
+                <a:pos x="connsiteX3" y="connsiteY3"/>
+              </a:cxn>
+              <a:cxn ang="0">
+                <a:pos x="connsiteX4" y="connsiteY4"/>
+              </a:cxn>
+              <a:cxn ang="0">
+                <a:pos x="connsiteX5" y="connsiteY5"/>
+              </a:cxn>
+              <a:cxn ang="0">
+                <a:pos x="connsiteX6" y="connsiteY6"/>
+              </a:cxn>
+            </a:cxnLst>
+            <a:rect l="l" t="t" r="r" b="b"/>
+            <a:pathLst>
+              <a:path w="4167271" h="6858000">
+                <a:moveTo>
+                  <a:pt x="0" y="0"/>
+                </a:moveTo>
+                <a:lnTo>
+                  <a:pt x="2259550" y="0"/>
+                </a:lnTo>
+                <a:lnTo>
+                  <a:pt x="2387803" y="82222"/>
+                </a:lnTo>
+                <a:cubicBezTo>
+                  <a:pt x="3461407" y="807534"/>
+                  <a:pt x="4167271" y="2035835"/>
+                  <a:pt x="4167271" y="3429000"/>
+                </a:cubicBezTo>
+                <a:cubicBezTo>
+                  <a:pt x="4167271" y="4822165"/>
+                  <a:pt x="3461407" y="6050467"/>
+                  <a:pt x="2387803" y="6775779"/>
+                </a:cubicBezTo>
+                <a:lnTo>
+                  <a:pt x="2259550" y="6858000"/>
+                </a:lnTo>
+                <a:lnTo>
+                  <a:pt x="0" y="6858000"/>
+                </a:lnTo>
+                <a:close/>
+              </a:path>
+            </a:pathLst>
+          </a:custGeom>
+          <a:solidFill>
+            <a:schemeClr val="accent2"/>
+          </a:solidFill>
+          <a:ln>
+            <a:noFill/>
+          </a:ln>
+        </p:spPr>
+        <p:style>
+          <a:lnRef idx="2">
+            <a:schemeClr val="accent1">
+              <a:shade val="50000"/>
+            </a:schemeClr>
+          </a:lnRef>
+          <a:fillRef idx="1">
+            <a:schemeClr val="accent1"/>
+          </a:fillRef>
+          <a:effectRef idx="0">
+            <a:schemeClr val="accent1"/>
+          </a:effectRef>
+          <a:fontRef idx="minor">
+            <a:schemeClr val="lt1"/>
+          </a:fontRef>
+        </p:style>
+        <p:txBody>
+          <a:bodyPr rtlCol="0" anchor="ctr"/>
+          <a:lstStyle/>
+          <a:p>
+            <a:pPr algn="ctr"/>
+            <a:endParaRPr lang="en-US"/>
+          </a:p>
+        </p:txBody>
+      </p:sp>
+      <p:sp>
+        <p:nvSpPr>
+          <p:cNvPr id="2" name="Title 1">
+            <a:extLst>
+              <a:ext uri="{FF2B5EF4-FFF2-40B4-BE49-F238E27FC236}">
+                <a16:creationId xmlns:a16="http://schemas.microsoft.com/office/drawing/2014/main" id="{EC50B952-CA9F-651B-DA93-CB15EC4BBF40}"/>
+              </a:ext>
+            </a:extLst>
+          </p:cNvPr>
+          <p:cNvSpPr>
+            <a:spLocks noGrp="1"/>
+          </p:cNvSpPr>
+          <p:nvPr>
+            <p:ph type="title"/>
+          </p:nvPr>
+        </p:nvSpPr>
+        <p:spPr>
+          <a:xfrm>
+            <a:off x="686834" y="1153572"/>
+            <a:ext cx="3200400" cy="4461163"/>
+          </a:xfrm>
+        </p:spPr>
+        <p:txBody>
+          <a:bodyPr>
+            <a:normAutofit/>
+          </a:bodyPr>
+          <a:lstStyle/>
+          <a:p>
+            <a:r>
+              <a:rPr lang="en-US">
+                <a:solidFill>
+                  <a:srgbClr val="FFFFFF"/>
+                </a:solidFill>
+              </a:rPr>
+              <a:t>References:</a:t>
+            </a:r>
+          </a:p>
+        </p:txBody>
+      </p:sp>
+      <p:sp>
+        <p:nvSpPr>
+          <p:cNvPr id="12" name="Arc 11">
+            <a:extLst>
+              <a:ext uri="{FF2B5EF4-FFF2-40B4-BE49-F238E27FC236}">
+                <a16:creationId xmlns:a16="http://schemas.microsoft.com/office/drawing/2014/main" id="{081E4A58-353D-44AE-B2FC-2A74E2E400F7}"/>
+              </a:ext>
+              <a:ext uri="{C183D7F6-B498-43B3-948B-1728B52AA6E4}">
+                <adec:decorative xmlns:adec="http://schemas.microsoft.com/office/drawing/2017/decorative" val="1"/>
+              </a:ext>
+            </a:extLst>
+          </p:cNvPr>
+          <p:cNvSpPr>
+            <a:spLocks noGrp="1" noRot="1" noChangeAspect="1" noMove="1" noResize="1" noEditPoints="1" noAdjustHandles="1" noChangeArrowheads="1" noChangeShapeType="1" noTextEdit="1"/>
+          </p:cNvSpPr>
+          <p:nvPr>
+            <p:extLst>
+              <p:ext uri="{386F3935-93C4-4BCD-93E2-E3B085C9AB24}">
+                <p16:designElem xmlns:p16="http://schemas.microsoft.com/office/powerpoint/2015/main" val="1"/>
+              </p:ext>
+            </p:extLst>
+          </p:nvPr>
+        </p:nvSpPr>
+        <p:spPr>
+          <a:xfrm flipV="1">
+            <a:off x="7550402" y="2455479"/>
+            <a:ext cx="4083433" cy="4083433"/>
+          </a:xfrm>
+          <a:prstGeom prst="arc">
+            <a:avLst/>
+          </a:prstGeom>
+          <a:ln w="127000" cap="rnd">
+            <a:solidFill>
+              <a:schemeClr val="accent4"/>
+            </a:solidFill>
+            <a:prstDash val="dash"/>
+          </a:ln>
+        </p:spPr>
+        <p:style>
+          <a:lnRef idx="1">
+            <a:schemeClr val="accent1"/>
+          </a:lnRef>
+          <a:fillRef idx="0">
+            <a:schemeClr val="accent1"/>
+          </a:fillRef>
+          <a:effectRef idx="0">
+            <a:schemeClr val="accent1"/>
+          </a:effectRef>
+          <a:fontRef idx="minor">
+            <a:schemeClr val="tx1"/>
+          </a:fontRef>
+        </p:style>
+        <p:txBody>
+          <a:bodyPr rtlCol="0" anchor="ctr"/>
+          <a:lstStyle/>
+          <a:p>
+            <a:pPr algn="ctr"/>
+            <a:endParaRPr lang="en-US" dirty="0"/>
+          </a:p>
+        </p:txBody>
+      </p:sp>
+      <p:sp>
+        <p:nvSpPr>
+          <p:cNvPr id="3" name="Content Placeholder 2">
+            <a:extLst>
+              <a:ext uri="{FF2B5EF4-FFF2-40B4-BE49-F238E27FC236}">
+                <a16:creationId xmlns:a16="http://schemas.microsoft.com/office/drawing/2014/main" id="{88F981B6-3169-B6DC-C6C8-403D8CBAE5BB}"/>
+              </a:ext>
+            </a:extLst>
+          </p:cNvPr>
+          <p:cNvSpPr>
+            <a:spLocks noGrp="1"/>
+          </p:cNvSpPr>
+          <p:nvPr>
+            <p:ph idx="1"/>
+          </p:nvPr>
+        </p:nvSpPr>
+        <p:spPr>
+          <a:xfrm>
+            <a:off x="4447308" y="591344"/>
+            <a:ext cx="6906491" cy="5585619"/>
+          </a:xfrm>
+        </p:spPr>
+        <p:txBody>
+          <a:bodyPr vert="horz" lIns="91440" tIns="45720" rIns="91440" bIns="45720" rtlCol="0" anchor="ctr">
+            <a:normAutofit/>
+          </a:bodyPr>
+          <a:lstStyle/>
+          <a:p>
+            <a:r>
+              <a:rPr lang="en-US">
+                <a:ea typeface="+mn-lt"/>
+                <a:cs typeface="+mn-lt"/>
+              </a:rPr>
+              <a:t>Generative AI (ChatGPT, CoPilot, etc.) </a:t>
+            </a:r>
+          </a:p>
+          <a:p>
+            <a:r>
+              <a:rPr lang="en-US">
+                <a:ea typeface="+mn-lt"/>
+                <a:cs typeface="+mn-lt"/>
+              </a:rPr>
+              <a:t>geeksforgeeks.org – A* algorithm base code </a:t>
+            </a:r>
+          </a:p>
+          <a:p>
+            <a:r>
+              <a:rPr lang="en-US">
+                <a:ea typeface="+mn-lt"/>
+                <a:cs typeface="+mn-lt"/>
+              </a:rPr>
+              <a:t>google.com – to search for pseudocode </a:t>
+            </a:r>
+          </a:p>
+          <a:p>
+            <a:r>
+              <a:rPr lang="en-US">
+                <a:ea typeface="+mn-lt"/>
+                <a:cs typeface="+mn-lt"/>
+              </a:rPr>
+              <a:t>Lecture Notes (Dr. Radian)</a:t>
+            </a:r>
+            <a:endParaRPr lang="en-US"/>
+          </a:p>
+        </p:txBody>
+      </p:sp>
+    </p:spTree>
+    <p:extLst>
+      <p:ext uri="{BB962C8B-B14F-4D97-AF65-F5344CB8AC3E}">
+        <p14:creationId xmlns:p14="http://schemas.microsoft.com/office/powerpoint/2010/main" val="1052681778"/>
+      </p:ext>
+    </p:extLst>
+  </p:cSld>
+  <p:clrMapOvr>
+    <a:masterClrMapping/>
+  </p:clrMapOvr>
+</p:sld>
+</file>
+
+<file path=ppt/slides/slide14.xml><?xml version="1.0" encoding="utf-8"?>
+<p:sld xmlns:a="http://schemas.openxmlformats.org/drawingml/2006/main" xmlns:r="http://schemas.openxmlformats.org/officeDocument/2006/relationships" xmlns:p="http://schemas.openxmlformats.org/presentationml/2006/main">
+  <p:cSld>
+    <p:bg>
+      <p:bgPr>
+        <a:solidFill>
+          <a:schemeClr val="bg1"/>
+        </a:solidFill>
+        <a:effectLst/>
+      </p:bgPr>
+    </p:bg>
+    <p:spTree>
+      <p:nvGrpSpPr>
+        <p:cNvPr id="1" name=""/>
+        <p:cNvGrpSpPr/>
+        <p:nvPr/>
+      </p:nvGrpSpPr>
+      <p:grpSpPr>
+        <a:xfrm>
+          <a:off x="0" y="0"/>
+          <a:ext cx="0" cy="0"/>
+          <a:chOff x="0" y="0"/>
+          <a:chExt cx="0" cy="0"/>
+        </a:xfrm>
+      </p:grpSpPr>
+      <p:sp useBgFill="1">
+        <p:nvSpPr>
+          <p:cNvPr id="23" name="Rectangle 22">
+            <a:extLst>
+              <a:ext uri="{FF2B5EF4-FFF2-40B4-BE49-F238E27FC236}">
+                <a16:creationId xmlns:a16="http://schemas.microsoft.com/office/drawing/2014/main" id="{0E30439A-8A5B-46EC-8283-9B6B031D40D0}"/>
+              </a:ext>
+              <a:ext uri="{C183D7F6-B498-43B3-948B-1728B52AA6E4}">
+                <adec:decorative xmlns:adec="http://schemas.microsoft.com/office/drawing/2017/decorative" val="1"/>
+              </a:ext>
+            </a:extLst>
+          </p:cNvPr>
+          <p:cNvSpPr>
+            <a:spLocks noGrp="1" noRot="1" noChangeAspect="1" noMove="1" noResize="1" noEditPoints="1" noAdjustHandles="1" noChangeArrowheads="1" noChangeShapeType="1" noTextEdit="1"/>
+          </p:cNvSpPr>
+          <p:nvPr>
+            <p:extLst>
+              <p:ext uri="{386F3935-93C4-4BCD-93E2-E3B085C9AB24}">
+                <p16:designElem xmlns:p16="http://schemas.microsoft.com/office/powerpoint/2015/main" val="1"/>
+              </p:ext>
+            </p:extLst>
+          </p:nvPr>
+        </p:nvSpPr>
+        <p:spPr>
+          <a:xfrm>
+            <a:off x="0" y="0"/>
+            <a:ext cx="12192000" cy="6858000"/>
+          </a:xfrm>
+          <a:prstGeom prst="rect">
+            <a:avLst/>
+          </a:prstGeom>
+          <a:ln w="12700" cap="flat" cmpd="sng" algn="ctr">
+            <a:noFill/>
+            <a:prstDash val="solid"/>
+            <a:miter lim="800000"/>
+          </a:ln>
+          <a:effectLst/>
+          <a:extLst>
+            <a:ext uri="{91240B29-F687-4F45-9708-019B960494DF}">
+              <a14:hiddenLine xmlns:a14="http://schemas.microsoft.com/office/drawing/2010/main" w="12700" cap="flat" cmpd="sng" algn="ctr">
+                <a:solidFill>
+                  <a:schemeClr val="accent1">
+                    <a:shade val="50000"/>
+                  </a:schemeClr>
+                </a:solidFill>
+                <a:prstDash val="solid"/>
+                <a:miter lim="800000"/>
+              </a14:hiddenLine>
+            </a:ext>
+          </a:extLst>
+        </p:spPr>
+        <p:style>
+          <a:lnRef idx="2">
+            <a:schemeClr val="accent1">
+              <a:shade val="50000"/>
+            </a:schemeClr>
+          </a:lnRef>
+          <a:fillRef idx="1">
+            <a:schemeClr val="accent1"/>
+          </a:fillRef>
+          <a:effectRef idx="0">
+            <a:schemeClr val="accent1"/>
+          </a:effectRef>
+          <a:fontRef idx="minor">
+            <a:schemeClr val="lt1"/>
+          </a:fontRef>
+        </p:style>
+        <p:txBody>
+          <a:bodyPr rtlCol="0" anchor="ctr"/>
+          <a:lstStyle/>
+          <a:p>
+            <a:pPr algn="ctr"/>
+            <a:endParaRPr lang="en-US"/>
+          </a:p>
+        </p:txBody>
+      </p:sp>
+      <p:sp>
+        <p:nvSpPr>
+          <p:cNvPr id="24" name="Rectangle 23">
+            <a:extLst>
+              <a:ext uri="{FF2B5EF4-FFF2-40B4-BE49-F238E27FC236}">
+                <a16:creationId xmlns:a16="http://schemas.microsoft.com/office/drawing/2014/main" id="{5CEAD642-85CF-4750-8432-7C80C901F001}"/>
+              </a:ext>
+              <a:ext uri="{C183D7F6-B498-43B3-948B-1728B52AA6E4}">
+                <adec:decorative xmlns:adec="http://schemas.microsoft.com/office/drawing/2017/decorative" val="1"/>
+              </a:ext>
+            </a:extLst>
+          </p:cNvPr>
+          <p:cNvSpPr>
+            <a:spLocks noGrp="1" noRot="1" noChangeAspect="1" noMove="1" noResize="1" noEditPoints="1" noAdjustHandles="1" noChangeArrowheads="1" noChangeShapeType="1" noTextEdit="1"/>
+          </p:cNvSpPr>
+          <p:nvPr>
+            <p:extLst>
+              <p:ext uri="{386F3935-93C4-4BCD-93E2-E3B085C9AB24}">
+                <p16:designElem xmlns:p16="http://schemas.microsoft.com/office/powerpoint/2015/main" val="1"/>
+              </p:ext>
+            </p:extLst>
+          </p:nvPr>
+        </p:nvSpPr>
+        <p:spPr>
+          <a:xfrm>
+            <a:off x="0" y="-427"/>
+            <a:ext cx="12192001" cy="6858000"/>
+          </a:xfrm>
+          <a:prstGeom prst="rect">
+            <a:avLst/>
+          </a:prstGeom>
+          <a:gradFill>
+            <a:gsLst>
+              <a:gs pos="0">
+                <a:srgbClr val="000000"/>
+              </a:gs>
+              <a:gs pos="100000">
+                <a:schemeClr val="accent1">
+                  <a:lumMod val="75000"/>
+                </a:schemeClr>
+              </a:gs>
+            </a:gsLst>
+            <a:lin ang="15000000" scaled="0"/>
+          </a:gradFill>
+          <a:ln>
+            <a:noFill/>
+          </a:ln>
+        </p:spPr>
+        <p:style>
+          <a:lnRef idx="2">
+            <a:schemeClr val="accent1">
+              <a:shade val="50000"/>
+            </a:schemeClr>
+          </a:lnRef>
+          <a:fillRef idx="1">
+            <a:schemeClr val="accent1"/>
+          </a:fillRef>
+          <a:effectRef idx="0">
+            <a:schemeClr val="accent1"/>
+          </a:effectRef>
+          <a:fontRef idx="minor">
+            <a:schemeClr val="lt1"/>
+          </a:fontRef>
+        </p:style>
+        <p:txBody>
+          <a:bodyPr rtlCol="0" anchor="ctr"/>
+          <a:lstStyle/>
+          <a:p>
+            <a:pPr algn="ctr"/>
+            <a:endParaRPr lang="en-US"/>
+          </a:p>
+        </p:txBody>
+      </p:sp>
+      <p:sp>
+        <p:nvSpPr>
+          <p:cNvPr id="25" name="Rectangle 24">
+            <a:extLst>
+              <a:ext uri="{FF2B5EF4-FFF2-40B4-BE49-F238E27FC236}">
+                <a16:creationId xmlns:a16="http://schemas.microsoft.com/office/drawing/2014/main" id="{FA33EEAE-15D5-4119-8C1E-89D943F911EF}"/>
+              </a:ext>
+              <a:ext uri="{C183D7F6-B498-43B3-948B-1728B52AA6E4}">
+                <adec:decorative xmlns:adec="http://schemas.microsoft.com/office/drawing/2017/decorative" val="1"/>
+              </a:ext>
+            </a:extLst>
+          </p:cNvPr>
+          <p:cNvSpPr>
+            <a:spLocks noGrp="1" noRot="1" noChangeAspect="1" noMove="1" noResize="1" noEditPoints="1" noAdjustHandles="1" noChangeArrowheads="1" noChangeShapeType="1" noTextEdit="1"/>
+          </p:cNvSpPr>
+          <p:nvPr>
+            <p:extLst>
+              <p:ext uri="{386F3935-93C4-4BCD-93E2-E3B085C9AB24}">
+                <p16:designElem xmlns:p16="http://schemas.microsoft.com/office/powerpoint/2015/main" val="1"/>
+              </p:ext>
+            </p:extLst>
+          </p:nvPr>
+        </p:nvSpPr>
+        <p:spPr>
+          <a:xfrm rot="10800000" flipH="1">
+            <a:off x="455521" y="-1720"/>
+            <a:ext cx="11750040" cy="6840685"/>
+          </a:xfrm>
+          <a:prstGeom prst="rect">
+            <a:avLst/>
+          </a:prstGeom>
+          <a:gradFill>
+            <a:gsLst>
+              <a:gs pos="21000">
+                <a:schemeClr val="accent1">
+                  <a:lumMod val="50000"/>
+                  <a:alpha val="61000"/>
+                </a:schemeClr>
+              </a:gs>
+              <a:gs pos="100000">
+                <a:schemeClr val="accent1">
+                  <a:alpha val="0"/>
+                </a:schemeClr>
+              </a:gs>
+            </a:gsLst>
+            <a:lin ang="21594000" scaled="0"/>
+          </a:gradFill>
+          <a:ln>
+            <a:noFill/>
+          </a:ln>
+        </p:spPr>
+        <p:style>
+          <a:lnRef idx="2">
+            <a:schemeClr val="accent1">
+              <a:shade val="50000"/>
+            </a:schemeClr>
+          </a:lnRef>
+          <a:fillRef idx="1">
+            <a:schemeClr val="accent1"/>
+          </a:fillRef>
+          <a:effectRef idx="0">
+            <a:schemeClr val="accent1"/>
+          </a:effectRef>
+          <a:fontRef idx="minor">
+            <a:schemeClr val="lt1"/>
+          </a:fontRef>
+        </p:style>
+        <p:txBody>
+          <a:bodyPr rtlCol="0" anchor="ctr"/>
+          <a:lstStyle/>
+          <a:p>
+            <a:pPr algn="ctr"/>
+            <a:endParaRPr lang="en-US"/>
+          </a:p>
+        </p:txBody>
+      </p:sp>
+      <p:sp>
+        <p:nvSpPr>
+          <p:cNvPr id="26" name="Rectangle 25">
+            <a:extLst>
+              <a:ext uri="{FF2B5EF4-FFF2-40B4-BE49-F238E27FC236}">
+                <a16:creationId xmlns:a16="http://schemas.microsoft.com/office/drawing/2014/main" id="{730D8B3B-9B80-4025-B934-26DC7D7CD231}"/>
+              </a:ext>
+              <a:ext uri="{C183D7F6-B498-43B3-948B-1728B52AA6E4}">
+                <adec:decorative xmlns:adec="http://schemas.microsoft.com/office/drawing/2017/decorative" val="1"/>
+              </a:ext>
+            </a:extLst>
+          </p:cNvPr>
+          <p:cNvSpPr>
+            <a:spLocks noGrp="1" noRot="1" noChangeAspect="1" noMove="1" noResize="1" noEditPoints="1" noAdjustHandles="1" noChangeArrowheads="1" noChangeShapeType="1" noTextEdit="1"/>
+          </p:cNvSpPr>
+          <p:nvPr>
+            <p:extLst>
+              <p:ext uri="{386F3935-93C4-4BCD-93E2-E3B085C9AB24}">
+                <p16:designElem xmlns:p16="http://schemas.microsoft.com/office/powerpoint/2015/main" val="1"/>
+              </p:ext>
+            </p:extLst>
+          </p:nvPr>
+        </p:nvSpPr>
+        <p:spPr>
+          <a:xfrm>
+            <a:off x="8606054" y="-1291"/>
+            <a:ext cx="3608179" cy="6858864"/>
+          </a:xfrm>
+          <a:prstGeom prst="rect">
+            <a:avLst/>
+          </a:prstGeom>
+          <a:gradFill>
+            <a:gsLst>
+              <a:gs pos="0">
+                <a:schemeClr val="accent1">
+                  <a:lumMod val="75000"/>
+                  <a:alpha val="0"/>
+                </a:schemeClr>
+              </a:gs>
+              <a:gs pos="99000">
+                <a:srgbClr val="000000">
+                  <a:alpha val="41000"/>
+                </a:srgbClr>
+              </a:gs>
+            </a:gsLst>
+            <a:lin ang="16200000" scaled="0"/>
+          </a:gradFill>
+          <a:ln>
+            <a:noFill/>
+          </a:ln>
+        </p:spPr>
+        <p:style>
+          <a:lnRef idx="2">
+            <a:schemeClr val="accent1">
+              <a:shade val="50000"/>
+            </a:schemeClr>
+          </a:lnRef>
+          <a:fillRef idx="1">
+            <a:schemeClr val="accent1"/>
+          </a:fillRef>
+          <a:effectRef idx="0">
+            <a:schemeClr val="accent1"/>
+          </a:effectRef>
+          <a:fontRef idx="minor">
+            <a:schemeClr val="lt1"/>
+          </a:fontRef>
+        </p:style>
+        <p:txBody>
+          <a:bodyPr rtlCol="0" anchor="ctr"/>
+          <a:lstStyle/>
+          <a:p>
+            <a:pPr algn="ctr"/>
+            <a:endParaRPr lang="en-US"/>
+          </a:p>
+        </p:txBody>
+      </p:sp>
+      <p:sp>
+        <p:nvSpPr>
+          <p:cNvPr id="27" name="Oval 26">
+            <a:extLst>
+              <a:ext uri="{FF2B5EF4-FFF2-40B4-BE49-F238E27FC236}">
+                <a16:creationId xmlns:a16="http://schemas.microsoft.com/office/drawing/2014/main" id="{B5A1B09C-1565-46F8-B70F-621C5EB48A09}"/>
+              </a:ext>
+              <a:ext uri="{C183D7F6-B498-43B3-948B-1728B52AA6E4}">
+                <adec:decorative xmlns:adec="http://schemas.microsoft.com/office/drawing/2017/decorative" val="1"/>
+              </a:ext>
+            </a:extLst>
+          </p:cNvPr>
+          <p:cNvSpPr>
+            <a:spLocks noGrp="1" noRot="1" noChangeAspect="1" noMove="1" noResize="1" noEditPoints="1" noAdjustHandles="1" noChangeArrowheads="1" noChangeShapeType="1" noTextEdit="1"/>
+          </p:cNvSpPr>
+          <p:nvPr>
+            <p:extLst>
+              <p:ext uri="{386F3935-93C4-4BCD-93E2-E3B085C9AB24}">
+                <p16:designElem xmlns:p16="http://schemas.microsoft.com/office/powerpoint/2015/main" val="1"/>
+              </p:ext>
+            </p:extLst>
+          </p:nvPr>
+        </p:nvSpPr>
+        <p:spPr>
+          <a:xfrm rot="15274173">
+            <a:off x="6059728" y="779270"/>
+            <a:ext cx="4967533" cy="4988390"/>
+          </a:xfrm>
+          <a:prstGeom prst="ellipse">
+            <a:avLst/>
+          </a:prstGeom>
+          <a:gradFill>
+            <a:gsLst>
+              <a:gs pos="0">
+                <a:schemeClr val="accent1">
+                  <a:alpha val="24000"/>
+                </a:schemeClr>
+              </a:gs>
+              <a:gs pos="79000">
+                <a:schemeClr val="accent1">
+                  <a:lumMod val="60000"/>
+                  <a:lumOff val="40000"/>
+                  <a:alpha val="0"/>
+                </a:schemeClr>
+              </a:gs>
+            </a:gsLst>
+            <a:lin ang="14400000" scaled="0"/>
+          </a:gradFill>
+          <a:ln>
+            <a:noFill/>
+          </a:ln>
+        </p:spPr>
+        <p:style>
+          <a:lnRef idx="2">
+            <a:schemeClr val="accent1">
+              <a:shade val="50000"/>
+            </a:schemeClr>
+          </a:lnRef>
+          <a:fillRef idx="1">
+            <a:schemeClr val="accent1"/>
+          </a:fillRef>
+          <a:effectRef idx="0">
+            <a:schemeClr val="accent1"/>
+          </a:effectRef>
+          <a:fontRef idx="minor">
+            <a:schemeClr val="lt1"/>
+          </a:fontRef>
+        </p:style>
+        <p:txBody>
+          <a:bodyPr rtlCol="0" anchor="ctr"/>
+          <a:lstStyle/>
+          <a:p>
+            <a:pPr algn="ctr"/>
+            <a:endParaRPr lang="en-US" dirty="0"/>
+          </a:p>
+        </p:txBody>
+      </p:sp>
+      <p:sp>
+        <p:nvSpPr>
+          <p:cNvPr id="2" name="Title 1">
+            <a:extLst>
+              <a:ext uri="{FF2B5EF4-FFF2-40B4-BE49-F238E27FC236}">
+                <a16:creationId xmlns:a16="http://schemas.microsoft.com/office/drawing/2014/main" id="{3CFB7924-1179-BBCB-421B-22110C90A483}"/>
+              </a:ext>
+            </a:extLst>
+          </p:cNvPr>
+          <p:cNvSpPr>
+            <a:spLocks noGrp="1"/>
+          </p:cNvSpPr>
+          <p:nvPr>
+            <p:ph type="title"/>
+          </p:nvPr>
+        </p:nvSpPr>
+        <p:spPr>
+          <a:xfrm>
+            <a:off x="1386865" y="818984"/>
+            <a:ext cx="6596245" cy="3268520"/>
+          </a:xfrm>
+        </p:spPr>
+        <p:txBody>
+          <a:bodyPr vert="horz" lIns="91440" tIns="45720" rIns="91440" bIns="45720" rtlCol="0" anchor="b">
+            <a:normAutofit/>
+          </a:bodyPr>
+          <a:lstStyle/>
+          <a:p>
+            <a:pPr algn="r"/>
+            <a:r>
+              <a:rPr lang="en-US" sz="4800" kern="1200">
+                <a:solidFill>
+                  <a:srgbClr val="FFFFFF"/>
+                </a:solidFill>
+                <a:latin typeface="+mj-lt"/>
+                <a:ea typeface="+mj-ea"/>
+                <a:cs typeface="+mj-cs"/>
+              </a:rPr>
+              <a:t>QnA</a:t>
+            </a:r>
+          </a:p>
+        </p:txBody>
+      </p:sp>
+      <p:sp>
+        <p:nvSpPr>
+          <p:cNvPr id="28" name="Rectangle 27">
+            <a:extLst>
+              <a:ext uri="{FF2B5EF4-FFF2-40B4-BE49-F238E27FC236}">
+                <a16:creationId xmlns:a16="http://schemas.microsoft.com/office/drawing/2014/main" id="{8C516CC8-80AC-446C-A56E-9F54B7210402}"/>
+              </a:ext>
+              <a:ext uri="{C183D7F6-B498-43B3-948B-1728B52AA6E4}">
+                <adec:decorative xmlns:adec="http://schemas.microsoft.com/office/drawing/2017/decorative" val="1"/>
+              </a:ext>
+            </a:extLst>
+          </p:cNvPr>
+          <p:cNvSpPr>
+            <a:spLocks noGrp="1" noRot="1" noChangeAspect="1" noMove="1" noResize="1" noEditPoints="1" noAdjustHandles="1" noChangeArrowheads="1" noChangeShapeType="1" noTextEdit="1"/>
+          </p:cNvSpPr>
+          <p:nvPr>
+            <p:extLst>
+              <p:ext uri="{386F3935-93C4-4BCD-93E2-E3B085C9AB24}">
+                <p16:designElem xmlns:p16="http://schemas.microsoft.com/office/powerpoint/2015/main" val="1"/>
+              </p:ext>
+            </p:extLst>
+          </p:nvPr>
+        </p:nvSpPr>
+        <p:spPr>
+          <a:xfrm rot="10800000" flipH="1">
+            <a:off x="6314" y="4480038"/>
+            <a:ext cx="12179371" cy="2377962"/>
+          </a:xfrm>
+          <a:prstGeom prst="rect">
+            <a:avLst/>
+          </a:prstGeom>
+          <a:gradFill>
+            <a:gsLst>
+              <a:gs pos="0">
+                <a:schemeClr val="accent1">
+                  <a:lumMod val="75000"/>
+                  <a:alpha val="50000"/>
+                </a:schemeClr>
+              </a:gs>
+              <a:gs pos="99000">
+                <a:srgbClr val="000000">
+                  <a:alpha val="34000"/>
+                </a:srgbClr>
+              </a:gs>
+            </a:gsLst>
+            <a:lin ang="17400000" scaled="0"/>
+          </a:gradFill>
+          <a:ln>
+            <a:noFill/>
+          </a:ln>
+        </p:spPr>
+        <p:style>
+          <a:lnRef idx="2">
+            <a:schemeClr val="accent1">
+              <a:shade val="50000"/>
+            </a:schemeClr>
+          </a:lnRef>
+          <a:fillRef idx="1">
+            <a:schemeClr val="accent1"/>
+          </a:fillRef>
+          <a:effectRef idx="0">
+            <a:schemeClr val="accent1"/>
+          </a:effectRef>
+          <a:fontRef idx="minor">
+            <a:schemeClr val="lt1"/>
+          </a:fontRef>
+        </p:style>
+        <p:txBody>
+          <a:bodyPr rtlCol="0" anchor="ctr"/>
+          <a:lstStyle/>
+          <a:p>
+            <a:pPr algn="ctr"/>
+            <a:endParaRPr lang="en-US"/>
+          </a:p>
+        </p:txBody>
+      </p:sp>
+      <p:sp>
+        <p:nvSpPr>
+          <p:cNvPr id="29" name="Rectangle 28">
+            <a:extLst>
+              <a:ext uri="{FF2B5EF4-FFF2-40B4-BE49-F238E27FC236}">
+                <a16:creationId xmlns:a16="http://schemas.microsoft.com/office/drawing/2014/main" id="{53947E58-F088-49F1-A3D1-DEA690192E84}"/>
+              </a:ext>
+              <a:ext uri="{C183D7F6-B498-43B3-948B-1728B52AA6E4}">
+                <adec:decorative xmlns:adec="http://schemas.microsoft.com/office/drawing/2017/decorative" val="1"/>
+              </a:ext>
+            </a:extLst>
+          </p:cNvPr>
+          <p:cNvSpPr>
+            <a:spLocks noGrp="1" noRot="1" noChangeAspect="1" noMove="1" noResize="1" noEditPoints="1" noAdjustHandles="1" noChangeArrowheads="1" noChangeShapeType="1" noTextEdit="1"/>
+          </p:cNvSpPr>
+          <p:nvPr>
+            <p:extLst>
+              <p:ext uri="{386F3935-93C4-4BCD-93E2-E3B085C9AB24}">
+                <p16:designElem xmlns:p16="http://schemas.microsoft.com/office/powerpoint/2015/main" val="1"/>
+              </p:ext>
+            </p:extLst>
+          </p:nvPr>
+        </p:nvSpPr>
+        <p:spPr>
+          <a:xfrm rot="16200000" flipH="1">
+            <a:off x="6967085" y="1632660"/>
+            <a:ext cx="6857572" cy="3592258"/>
+          </a:xfrm>
+          <a:prstGeom prst="rect">
+            <a:avLst/>
+          </a:prstGeom>
+          <a:gradFill>
+            <a:gsLst>
+              <a:gs pos="0">
+                <a:schemeClr val="accent1">
+                  <a:lumMod val="75000"/>
+                  <a:alpha val="50000"/>
+                </a:schemeClr>
+              </a:gs>
+              <a:gs pos="99000">
+                <a:srgbClr val="000000">
+                  <a:alpha val="0"/>
+                </a:srgbClr>
+              </a:gs>
+            </a:gsLst>
+            <a:lin ang="15600000" scaled="0"/>
+          </a:gradFill>
+          <a:ln>
+            <a:noFill/>
+          </a:ln>
+        </p:spPr>
+        <p:style>
+          <a:lnRef idx="2">
+            <a:schemeClr val="accent1">
+              <a:shade val="50000"/>
+            </a:schemeClr>
+          </a:lnRef>
+          <a:fillRef idx="1">
+            <a:schemeClr val="accent1"/>
+          </a:fillRef>
+          <a:effectRef idx="0">
+            <a:schemeClr val="accent1"/>
+          </a:effectRef>
+          <a:fontRef idx="minor">
+            <a:schemeClr val="lt1"/>
+          </a:fontRef>
+        </p:style>
+        <p:txBody>
+          <a:bodyPr rtlCol="0" anchor="ctr"/>
+          <a:lstStyle/>
+          <a:p>
+            <a:pPr algn="ctr"/>
+            <a:endParaRPr lang="en-US"/>
+          </a:p>
+        </p:txBody>
+      </p:sp>
+    </p:spTree>
+    <p:extLst>
+      <p:ext uri="{BB962C8B-B14F-4D97-AF65-F5344CB8AC3E}">
+        <p14:creationId xmlns:p14="http://schemas.microsoft.com/office/powerpoint/2010/main" val="638582807"/>
       </p:ext>
     </p:extLst>
   </p:cSld>
@@ -9895,7 +12377,7 @@
           <p:nvPr/>
         </p:nvPicPr>
         <p:blipFill>
-          <a:blip r:embed="rId2"/>
+          <a:blip r:embed="rId3"/>
           <a:srcRect r="3072" b="1"/>
           <a:stretch>
             <a:fillRect/>
@@ -30677,10 +33159,10 @@
       </p:grpSpPr>
       <p:sp useBgFill="1">
         <p:nvSpPr>
-          <p:cNvPr id="10" name="Rectangle 9">
+          <p:cNvPr id="27" name="Rectangle 26">
             <a:extLst>
               <a:ext uri="{FF2B5EF4-FFF2-40B4-BE49-F238E27FC236}">
-                <a16:creationId xmlns:a16="http://schemas.microsoft.com/office/drawing/2014/main" id="{2B97F24A-32CE-4C1C-A50D-3016B394DCFB}"/>
+                <a16:creationId xmlns:a16="http://schemas.microsoft.com/office/drawing/2014/main" id="{2151139A-886F-4B97-8815-729AD3831BBD}"/>
               </a:ext>
               <a:ext uri="{C183D7F6-B498-43B3-948B-1728B52AA6E4}">
                 <adec:decorative xmlns:adec="http://schemas.microsoft.com/office/drawing/2017/decorative" val="1"/>
@@ -30706,6 +33188,324 @@
           <a:prstGeom prst="rect">
             <a:avLst/>
           </a:prstGeom>
+          <a:ln w="12700" cap="flat" cmpd="sng" algn="ctr">
+            <a:noFill/>
+            <a:prstDash val="solid"/>
+            <a:miter lim="800000"/>
+          </a:ln>
+          <a:effectLst/>
+          <a:extLst>
+            <a:ext uri="{91240B29-F687-4F45-9708-019B960494DF}">
+              <a14:hiddenLine xmlns:a14="http://schemas.microsoft.com/office/drawing/2010/main" w="12700" cap="flat" cmpd="sng" algn="ctr">
+                <a:solidFill>
+                  <a:schemeClr val="accent1">
+                    <a:shade val="50000"/>
+                  </a:schemeClr>
+                </a:solidFill>
+                <a:prstDash val="solid"/>
+                <a:miter lim="800000"/>
+              </a14:hiddenLine>
+            </a:ext>
+          </a:extLst>
+        </p:spPr>
+        <p:style>
+          <a:lnRef idx="2">
+            <a:schemeClr val="accent1">
+              <a:shade val="50000"/>
+            </a:schemeClr>
+          </a:lnRef>
+          <a:fillRef idx="1">
+            <a:schemeClr val="accent1"/>
+          </a:fillRef>
+          <a:effectRef idx="0">
+            <a:schemeClr val="accent1"/>
+          </a:effectRef>
+          <a:fontRef idx="minor">
+            <a:schemeClr val="lt1"/>
+          </a:fontRef>
+        </p:style>
+        <p:txBody>
+          <a:bodyPr rtlCol="0" anchor="ctr"/>
+          <a:lstStyle/>
+          <a:p>
+            <a:pPr algn="ctr"/>
+            <a:endParaRPr lang="en-US" sz="2000"/>
+          </a:p>
+        </p:txBody>
+      </p:sp>
+      <p:sp>
+        <p:nvSpPr>
+          <p:cNvPr id="29" name="Rectangle 28">
+            <a:extLst>
+              <a:ext uri="{FF2B5EF4-FFF2-40B4-BE49-F238E27FC236}">
+                <a16:creationId xmlns:a16="http://schemas.microsoft.com/office/drawing/2014/main" id="{AB5E08C4-8CDD-4623-A5B8-E998C6DEE3B7}"/>
+              </a:ext>
+              <a:ext uri="{C183D7F6-B498-43B3-948B-1728B52AA6E4}">
+                <adec:decorative xmlns:adec="http://schemas.microsoft.com/office/drawing/2017/decorative" val="1"/>
+              </a:ext>
+            </a:extLst>
+          </p:cNvPr>
+          <p:cNvSpPr>
+            <a:spLocks noGrp="1" noRot="1" noChangeAspect="1" noMove="1" noResize="1" noEditPoints="1" noAdjustHandles="1" noChangeArrowheads="1" noChangeShapeType="1" noTextEdit="1"/>
+          </p:cNvSpPr>
+          <p:nvPr>
+            <p:extLst>
+              <p:ext uri="{386F3935-93C4-4BCD-93E2-E3B085C9AB24}">
+                <p16:designElem xmlns:p16="http://schemas.microsoft.com/office/powerpoint/2015/main" val="1"/>
+              </p:ext>
+            </p:extLst>
+          </p:nvPr>
+        </p:nvSpPr>
+        <p:spPr>
+          <a:xfrm flipH="1">
+            <a:off x="2" y="492"/>
+            <a:ext cx="12191998" cy="1575955"/>
+          </a:xfrm>
+          <a:prstGeom prst="rect">
+            <a:avLst/>
+          </a:prstGeom>
+          <a:gradFill>
+            <a:gsLst>
+              <a:gs pos="0">
+                <a:schemeClr val="accent1">
+                  <a:lumMod val="50000"/>
+                </a:schemeClr>
+              </a:gs>
+              <a:gs pos="100000">
+                <a:schemeClr val="accent1">
+                  <a:lumMod val="75000"/>
+                </a:schemeClr>
+              </a:gs>
+            </a:gsLst>
+            <a:lin ang="8400000" scaled="0"/>
+          </a:gradFill>
+          <a:ln>
+            <a:noFill/>
+          </a:ln>
+        </p:spPr>
+        <p:style>
+          <a:lnRef idx="2">
+            <a:schemeClr val="accent1">
+              <a:shade val="50000"/>
+            </a:schemeClr>
+          </a:lnRef>
+          <a:fillRef idx="1">
+            <a:schemeClr val="accent1"/>
+          </a:fillRef>
+          <a:effectRef idx="0">
+            <a:schemeClr val="accent1"/>
+          </a:effectRef>
+          <a:fontRef idx="minor">
+            <a:schemeClr val="lt1"/>
+          </a:fontRef>
+        </p:style>
+        <p:txBody>
+          <a:bodyPr rtlCol="0" anchor="ctr"/>
+          <a:lstStyle/>
+          <a:p>
+            <a:pPr algn="ctr"/>
+            <a:endParaRPr lang="en-US"/>
+          </a:p>
+        </p:txBody>
+      </p:sp>
+      <p:sp>
+        <p:nvSpPr>
+          <p:cNvPr id="31" name="Rectangle 30">
+            <a:extLst>
+              <a:ext uri="{FF2B5EF4-FFF2-40B4-BE49-F238E27FC236}">
+                <a16:creationId xmlns:a16="http://schemas.microsoft.com/office/drawing/2014/main" id="{15F33878-D502-4FFA-8ACE-F2AECDB2A23F}"/>
+              </a:ext>
+              <a:ext uri="{C183D7F6-B498-43B3-948B-1728B52AA6E4}">
+                <adec:decorative xmlns:adec="http://schemas.microsoft.com/office/drawing/2017/decorative" val="1"/>
+              </a:ext>
+            </a:extLst>
+          </p:cNvPr>
+          <p:cNvSpPr>
+            <a:spLocks noGrp="1" noRot="1" noChangeAspect="1" noMove="1" noResize="1" noEditPoints="1" noAdjustHandles="1" noChangeArrowheads="1" noChangeShapeType="1" noTextEdit="1"/>
+          </p:cNvSpPr>
+          <p:nvPr>
+            <p:extLst>
+              <p:ext uri="{386F3935-93C4-4BCD-93E2-E3B085C9AB24}">
+                <p16:designElem xmlns:p16="http://schemas.microsoft.com/office/powerpoint/2015/main" val="1"/>
+              </p:ext>
+            </p:extLst>
+          </p:nvPr>
+        </p:nvSpPr>
+        <p:spPr>
+          <a:xfrm rot="10800000" flipH="1">
+            <a:off x="8128857" y="35"/>
+            <a:ext cx="4063143" cy="1576412"/>
+          </a:xfrm>
+          <a:prstGeom prst="rect">
+            <a:avLst/>
+          </a:prstGeom>
+          <a:gradFill>
+            <a:gsLst>
+              <a:gs pos="19000">
+                <a:schemeClr val="accent1">
+                  <a:lumMod val="50000"/>
+                  <a:alpha val="68000"/>
+                </a:schemeClr>
+              </a:gs>
+              <a:gs pos="100000">
+                <a:schemeClr val="accent1">
+                  <a:alpha val="79000"/>
+                </a:schemeClr>
+              </a:gs>
+            </a:gsLst>
+            <a:lin ang="19200000" scaled="0"/>
+          </a:gradFill>
+          <a:ln>
+            <a:noFill/>
+          </a:ln>
+        </p:spPr>
+        <p:style>
+          <a:lnRef idx="2">
+            <a:schemeClr val="accent1">
+              <a:shade val="50000"/>
+            </a:schemeClr>
+          </a:lnRef>
+          <a:fillRef idx="1">
+            <a:schemeClr val="accent1"/>
+          </a:fillRef>
+          <a:effectRef idx="0">
+            <a:schemeClr val="accent1"/>
+          </a:effectRef>
+          <a:fontRef idx="minor">
+            <a:schemeClr val="lt1"/>
+          </a:fontRef>
+        </p:style>
+        <p:txBody>
+          <a:bodyPr rtlCol="0" anchor="ctr"/>
+          <a:lstStyle/>
+          <a:p>
+            <a:pPr algn="ctr"/>
+            <a:endParaRPr lang="en-US"/>
+          </a:p>
+        </p:txBody>
+      </p:sp>
+      <p:sp>
+        <p:nvSpPr>
+          <p:cNvPr id="33" name="Rectangle 32">
+            <a:extLst>
+              <a:ext uri="{FF2B5EF4-FFF2-40B4-BE49-F238E27FC236}">
+                <a16:creationId xmlns:a16="http://schemas.microsoft.com/office/drawing/2014/main" id="{D3539FEE-81D3-4406-802E-60B20B16F4F6}"/>
+              </a:ext>
+              <a:ext uri="{C183D7F6-B498-43B3-948B-1728B52AA6E4}">
+                <adec:decorative xmlns:adec="http://schemas.microsoft.com/office/drawing/2017/decorative" val="1"/>
+              </a:ext>
+            </a:extLst>
+          </p:cNvPr>
+          <p:cNvSpPr>
+            <a:spLocks noGrp="1" noRot="1" noChangeAspect="1" noMove="1" noResize="1" noEditPoints="1" noAdjustHandles="1" noChangeArrowheads="1" noChangeShapeType="1" noTextEdit="1"/>
+          </p:cNvSpPr>
+          <p:nvPr>
+            <p:extLst>
+              <p:ext uri="{386F3935-93C4-4BCD-93E2-E3B085C9AB24}">
+                <p16:designElem xmlns:p16="http://schemas.microsoft.com/office/powerpoint/2015/main" val="1"/>
+              </p:ext>
+            </p:extLst>
+          </p:nvPr>
+        </p:nvSpPr>
+        <p:spPr>
+          <a:xfrm rot="5400000">
+            <a:off x="5307778" y="-5307777"/>
+            <a:ext cx="1576446" cy="12192001"/>
+          </a:xfrm>
+          <a:prstGeom prst="rect">
+            <a:avLst/>
+          </a:prstGeom>
+          <a:gradFill>
+            <a:gsLst>
+              <a:gs pos="16000">
+                <a:srgbClr val="000000">
+                  <a:alpha val="0"/>
+                </a:srgbClr>
+              </a:gs>
+              <a:gs pos="99000">
+                <a:srgbClr val="000000">
+                  <a:alpha val="87000"/>
+                </a:srgbClr>
+              </a:gs>
+            </a:gsLst>
+            <a:lin ang="11400000" scaled="0"/>
+          </a:gradFill>
+          <a:ln>
+            <a:noFill/>
+          </a:ln>
+        </p:spPr>
+        <p:style>
+          <a:lnRef idx="2">
+            <a:schemeClr val="accent1">
+              <a:shade val="50000"/>
+            </a:schemeClr>
+          </a:lnRef>
+          <a:fillRef idx="1">
+            <a:schemeClr val="accent1"/>
+          </a:fillRef>
+          <a:effectRef idx="0">
+            <a:schemeClr val="accent1"/>
+          </a:effectRef>
+          <a:fontRef idx="minor">
+            <a:schemeClr val="lt1"/>
+          </a:fontRef>
+        </p:style>
+        <p:txBody>
+          <a:bodyPr rtlCol="0" anchor="ctr"/>
+          <a:lstStyle/>
+          <a:p>
+            <a:pPr algn="ctr"/>
+            <a:endParaRPr lang="en-US" dirty="0"/>
+          </a:p>
+        </p:txBody>
+      </p:sp>
+      <p:sp>
+        <p:nvSpPr>
+          <p:cNvPr id="35" name="Rectangle 34">
+            <a:extLst>
+              <a:ext uri="{FF2B5EF4-FFF2-40B4-BE49-F238E27FC236}">
+                <a16:creationId xmlns:a16="http://schemas.microsoft.com/office/drawing/2014/main" id="{DC701763-729E-462F-A5A8-E0DEFEB1E2E4}"/>
+              </a:ext>
+              <a:ext uri="{C183D7F6-B498-43B3-948B-1728B52AA6E4}">
+                <adec:decorative xmlns:adec="http://schemas.microsoft.com/office/drawing/2017/decorative" val="1"/>
+              </a:ext>
+            </a:extLst>
+          </p:cNvPr>
+          <p:cNvSpPr>
+            <a:spLocks noGrp="1" noRot="1" noChangeAspect="1" noMove="1" noResize="1" noEditPoints="1" noAdjustHandles="1" noChangeArrowheads="1" noChangeShapeType="1" noTextEdit="1"/>
+          </p:cNvSpPr>
+          <p:nvPr>
+            <p:extLst>
+              <p:ext uri="{386F3935-93C4-4BCD-93E2-E3B085C9AB24}">
+                <p16:designElem xmlns:p16="http://schemas.microsoft.com/office/powerpoint/2015/main" val="1"/>
+              </p:ext>
+            </p:extLst>
+          </p:nvPr>
+        </p:nvSpPr>
+        <p:spPr>
+          <a:xfrm>
+            <a:off x="3825434" y="986"/>
+            <a:ext cx="4303422" cy="1575461"/>
+          </a:xfrm>
+          <a:prstGeom prst="rect">
+            <a:avLst/>
+          </a:prstGeom>
+          <a:gradFill>
+            <a:gsLst>
+              <a:gs pos="0">
+                <a:schemeClr val="accent1">
+                  <a:alpha val="17000"/>
+                </a:schemeClr>
+              </a:gs>
+              <a:gs pos="74000">
+                <a:schemeClr val="accent1">
+                  <a:lumMod val="50000"/>
+                  <a:alpha val="0"/>
+                </a:schemeClr>
+              </a:gs>
+            </a:gsLst>
+            <a:lin ang="14400000" scaled="0"/>
+          </a:gradFill>
           <a:ln>
             <a:noFill/>
           </a:ln>
@@ -30740,7 +33540,7 @@
           <p:cNvPr id="2" name="Title 1">
             <a:extLst>
               <a:ext uri="{FF2B5EF4-FFF2-40B4-BE49-F238E27FC236}">
-                <a16:creationId xmlns:a16="http://schemas.microsoft.com/office/drawing/2014/main" id="{439345D5-4422-8526-1FDD-46D06345E8A7}"/>
+                <a16:creationId xmlns:a16="http://schemas.microsoft.com/office/drawing/2014/main" id="{49483133-EF8E-3D36-2958-8930E30B77BC}"/>
               </a:ext>
             </a:extLst>
           </p:cNvPr>
@@ -30753,343 +33553,33 @@
         </p:nvSpPr>
         <p:spPr>
           <a:xfrm>
-            <a:off x="630936" y="639520"/>
-            <a:ext cx="3429000" cy="1719072"/>
+            <a:off x="699714" y="353160"/>
+            <a:ext cx="7091300" cy="898581"/>
           </a:xfrm>
         </p:spPr>
         <p:txBody>
-          <a:bodyPr anchor="b">
+          <a:bodyPr vert="horz" lIns="91440" tIns="45720" rIns="91440" bIns="45720" rtlCol="0" anchor="ctr">
             <a:normAutofit/>
           </a:bodyPr>
           <a:lstStyle/>
           <a:p>
             <a:r>
-              <a:rPr lang="en-US" sz="5400"/>
-              <a:t>Runtime Graphs:</a:t>
-            </a:r>
-          </a:p>
-        </p:txBody>
-      </p:sp>
-      <p:sp>
-        <p:nvSpPr>
-          <p:cNvPr id="12" name="sketch line">
-            <a:extLst>
-              <a:ext uri="{FF2B5EF4-FFF2-40B4-BE49-F238E27FC236}">
-                <a16:creationId xmlns:a16="http://schemas.microsoft.com/office/drawing/2014/main" id="{CD8B4F24-440B-49E9-B85D-733523DC064B}"/>
-              </a:ext>
-              <a:ext uri="{C183D7F6-B498-43B3-948B-1728B52AA6E4}">
-                <adec:decorative xmlns:adec="http://schemas.microsoft.com/office/drawing/2017/decorative" val="1"/>
-              </a:ext>
-            </a:extLst>
-          </p:cNvPr>
-          <p:cNvSpPr>
-            <a:spLocks noGrp="1" noRot="1" noChangeAspect="1" noMove="1" noResize="1" noEditPoints="1" noAdjustHandles="1" noChangeArrowheads="1" noChangeShapeType="1" noTextEdit="1"/>
-          </p:cNvSpPr>
-          <p:nvPr>
-            <p:extLst>
-              <p:ext uri="{386F3935-93C4-4BCD-93E2-E3B085C9AB24}">
-                <p16:designElem xmlns:p16="http://schemas.microsoft.com/office/powerpoint/2015/main" val="1"/>
-              </p:ext>
-            </p:extLst>
-          </p:nvPr>
-        </p:nvSpPr>
-        <p:spPr>
-          <a:xfrm>
-            <a:off x="643278" y="2573756"/>
-            <a:ext cx="3255095" cy="18288"/>
-          </a:xfrm>
-          <a:custGeom>
-            <a:avLst/>
-            <a:gdLst>
-              <a:gd name="csX0" fmla="*/ 0 w 3255095"/>
-              <a:gd name="csY0" fmla="*/ 0 h 18288"/>
-              <a:gd name="csX1" fmla="*/ 618468 w 3255095"/>
-              <a:gd name="csY1" fmla="*/ 0 h 18288"/>
-              <a:gd name="csX2" fmla="*/ 1269487 w 3255095"/>
-              <a:gd name="csY2" fmla="*/ 0 h 18288"/>
-              <a:gd name="csX3" fmla="*/ 1953057 w 3255095"/>
-              <a:gd name="csY3" fmla="*/ 0 h 18288"/>
-              <a:gd name="csX4" fmla="*/ 2636627 w 3255095"/>
-              <a:gd name="csY4" fmla="*/ 0 h 18288"/>
-              <a:gd name="csX5" fmla="*/ 3255095 w 3255095"/>
-              <a:gd name="csY5" fmla="*/ 0 h 18288"/>
-              <a:gd name="csX6" fmla="*/ 3255095 w 3255095"/>
-              <a:gd name="csY6" fmla="*/ 18288 h 18288"/>
-              <a:gd name="csX7" fmla="*/ 2538974 w 3255095"/>
-              <a:gd name="csY7" fmla="*/ 18288 h 18288"/>
-              <a:gd name="csX8" fmla="*/ 1822853 w 3255095"/>
-              <a:gd name="csY8" fmla="*/ 18288 h 18288"/>
-              <a:gd name="csX9" fmla="*/ 1171834 w 3255095"/>
-              <a:gd name="csY9" fmla="*/ 18288 h 18288"/>
-              <a:gd name="csX10" fmla="*/ 0 w 3255095"/>
-              <a:gd name="csY10" fmla="*/ 18288 h 18288"/>
-              <a:gd name="csX11" fmla="*/ 0 w 3255095"/>
-              <a:gd name="csY11" fmla="*/ 0 h 18288"/>
-            </a:gdLst>
-            <a:ahLst/>
-            <a:cxnLst>
-              <a:cxn ang="0">
-                <a:pos x="csX0" y="csY0"/>
-              </a:cxn>
-              <a:cxn ang="0">
-                <a:pos x="csX1" y="csY1"/>
-              </a:cxn>
-              <a:cxn ang="0">
-                <a:pos x="csX2" y="csY2"/>
-              </a:cxn>
-              <a:cxn ang="0">
-                <a:pos x="csX3" y="csY3"/>
-              </a:cxn>
-              <a:cxn ang="0">
-                <a:pos x="csX4" y="csY4"/>
-              </a:cxn>
-              <a:cxn ang="0">
-                <a:pos x="csX5" y="csY5"/>
-              </a:cxn>
-              <a:cxn ang="0">
-                <a:pos x="csX6" y="csY6"/>
-              </a:cxn>
-              <a:cxn ang="0">
-                <a:pos x="csX7" y="csY7"/>
-              </a:cxn>
-              <a:cxn ang="0">
-                <a:pos x="csX8" y="csY8"/>
-              </a:cxn>
-              <a:cxn ang="0">
-                <a:pos x="csX9" y="csY9"/>
-              </a:cxn>
-              <a:cxn ang="0">
-                <a:pos x="csX10" y="csY10"/>
-              </a:cxn>
-              <a:cxn ang="0">
-                <a:pos x="csX11" y="csY11"/>
-              </a:cxn>
-            </a:cxnLst>
-            <a:rect l="l" t="t" r="r" b="b"/>
-            <a:pathLst>
-              <a:path w="3255095" h="18288" fill="none" extrusionOk="0">
-                <a:moveTo>
-                  <a:pt x="0" y="0"/>
-                </a:moveTo>
-                <a:cubicBezTo>
-                  <a:pt x="240201" y="-22123"/>
-                  <a:pt x="462021" y="-19623"/>
-                  <a:pt x="618468" y="0"/>
-                </a:cubicBezTo>
-                <a:cubicBezTo>
-                  <a:pt x="774915" y="19623"/>
-                  <a:pt x="974734" y="2035"/>
-                  <a:pt x="1269487" y="0"/>
-                </a:cubicBezTo>
-                <a:cubicBezTo>
-                  <a:pt x="1564240" y="-2035"/>
-                  <a:pt x="1733579" y="10639"/>
-                  <a:pt x="1953057" y="0"/>
-                </a:cubicBezTo>
-                <a:cubicBezTo>
-                  <a:pt x="2172535" y="-10639"/>
-                  <a:pt x="2453962" y="14018"/>
-                  <a:pt x="2636627" y="0"/>
-                </a:cubicBezTo>
-                <a:cubicBezTo>
-                  <a:pt x="2819292" y="-14018"/>
-                  <a:pt x="3121375" y="5399"/>
-                  <a:pt x="3255095" y="0"/>
-                </a:cubicBezTo>
-                <a:cubicBezTo>
-                  <a:pt x="3254386" y="8157"/>
-                  <a:pt x="3254682" y="12125"/>
-                  <a:pt x="3255095" y="18288"/>
-                </a:cubicBezTo>
-                <a:cubicBezTo>
-                  <a:pt x="3088545" y="23203"/>
-                  <a:pt x="2687475" y="7419"/>
-                  <a:pt x="2538974" y="18288"/>
-                </a:cubicBezTo>
-                <a:cubicBezTo>
-                  <a:pt x="2390473" y="29157"/>
-                  <a:pt x="2137381" y="-8959"/>
-                  <a:pt x="1822853" y="18288"/>
-                </a:cubicBezTo>
-                <a:cubicBezTo>
-                  <a:pt x="1508325" y="45535"/>
-                  <a:pt x="1466437" y="20385"/>
-                  <a:pt x="1171834" y="18288"/>
-                </a:cubicBezTo>
-                <a:cubicBezTo>
-                  <a:pt x="877231" y="16191"/>
-                  <a:pt x="561097" y="37643"/>
-                  <a:pt x="0" y="18288"/>
-                </a:cubicBezTo>
-                <a:cubicBezTo>
-                  <a:pt x="-46" y="12483"/>
-                  <a:pt x="-203" y="6491"/>
-                  <a:pt x="0" y="0"/>
-                </a:cubicBezTo>
-                <a:close/>
-              </a:path>
-              <a:path w="3255095" h="18288" stroke="0" extrusionOk="0">
-                <a:moveTo>
-                  <a:pt x="0" y="0"/>
-                </a:moveTo>
-                <a:cubicBezTo>
-                  <a:pt x="291965" y="19429"/>
-                  <a:pt x="363155" y="8568"/>
-                  <a:pt x="618468" y="0"/>
-                </a:cubicBezTo>
-                <a:cubicBezTo>
-                  <a:pt x="873781" y="-8568"/>
-                  <a:pt x="904459" y="-19505"/>
-                  <a:pt x="1171834" y="0"/>
-                </a:cubicBezTo>
-                <a:cubicBezTo>
-                  <a:pt x="1439209" y="19505"/>
-                  <a:pt x="1744369" y="9790"/>
-                  <a:pt x="1887955" y="0"/>
-                </a:cubicBezTo>
-                <a:cubicBezTo>
-                  <a:pt x="2031541" y="-9790"/>
-                  <a:pt x="2346378" y="21240"/>
-                  <a:pt x="2506423" y="0"/>
-                </a:cubicBezTo>
-                <a:cubicBezTo>
-                  <a:pt x="2666468" y="-21240"/>
-                  <a:pt x="2990257" y="30414"/>
-                  <a:pt x="3255095" y="0"/>
-                </a:cubicBezTo>
-                <a:cubicBezTo>
-                  <a:pt x="3254831" y="4493"/>
-                  <a:pt x="3255479" y="9472"/>
-                  <a:pt x="3255095" y="18288"/>
-                </a:cubicBezTo>
-                <a:cubicBezTo>
-                  <a:pt x="3120743" y="16690"/>
-                  <a:pt x="2759628" y="42462"/>
-                  <a:pt x="2604076" y="18288"/>
-                </a:cubicBezTo>
-                <a:cubicBezTo>
-                  <a:pt x="2448524" y="-5886"/>
-                  <a:pt x="2184336" y="19599"/>
-                  <a:pt x="1887955" y="18288"/>
-                </a:cubicBezTo>
-                <a:cubicBezTo>
-                  <a:pt x="1591574" y="16977"/>
-                  <a:pt x="1548845" y="6870"/>
-                  <a:pt x="1334589" y="18288"/>
-                </a:cubicBezTo>
-                <a:cubicBezTo>
-                  <a:pt x="1120333" y="29706"/>
-                  <a:pt x="996014" y="9662"/>
-                  <a:pt x="683570" y="18288"/>
-                </a:cubicBezTo>
-                <a:cubicBezTo>
-                  <a:pt x="371126" y="26914"/>
-                  <a:pt x="198687" y="16167"/>
-                  <a:pt x="0" y="18288"/>
-                </a:cubicBezTo>
-                <a:cubicBezTo>
-                  <a:pt x="843" y="9577"/>
-                  <a:pt x="371" y="6900"/>
-                  <a:pt x="0" y="0"/>
-                </a:cubicBezTo>
-                <a:close/>
-              </a:path>
-            </a:pathLst>
-          </a:custGeom>
-          <a:solidFill>
-            <a:schemeClr val="accent2"/>
-          </a:solidFill>
-          <a:ln w="38100" cap="rnd">
-            <a:solidFill>
-              <a:schemeClr val="accent2"/>
-            </a:solidFill>
-            <a:round/>
-            <a:extLst>
-              <a:ext uri="{C807C97D-BFC1-408E-A445-0C87EB9F89A2}">
-                <ask:lineSketchStyleProps xmlns:ask="http://schemas.microsoft.com/office/drawing/2018/sketchyshapes" sd="1219033472">
-                  <a:prstGeom prst="rect">
-                    <a:avLst/>
-                  </a:prstGeom>
-                  <ask:type>
-                    <ask:lineSketchFreehand/>
-                  </ask:type>
-                </ask:lineSketchStyleProps>
-              </a:ext>
-            </a:extLst>
-          </a:ln>
-        </p:spPr>
-        <p:style>
-          <a:lnRef idx="2">
-            <a:schemeClr val="accent1">
-              <a:shade val="50000"/>
-            </a:schemeClr>
-          </a:lnRef>
-          <a:fillRef idx="1">
-            <a:schemeClr val="accent1"/>
-          </a:fillRef>
-          <a:effectRef idx="0">
-            <a:schemeClr val="accent1"/>
-          </a:effectRef>
-          <a:fontRef idx="minor">
-            <a:schemeClr val="lt1"/>
-          </a:fontRef>
-        </p:style>
-        <p:txBody>
-          <a:bodyPr rtlCol="0" anchor="ctr"/>
-          <a:lstStyle/>
-          <a:p>
-            <a:pPr algn="ctr"/>
-            <a:endParaRPr lang="en-US"/>
-          </a:p>
-        </p:txBody>
-      </p:sp>
-      <p:sp>
-        <p:nvSpPr>
-          <p:cNvPr id="3" name="Content Placeholder 2">
-            <a:extLst>
-              <a:ext uri="{FF2B5EF4-FFF2-40B4-BE49-F238E27FC236}">
-                <a16:creationId xmlns:a16="http://schemas.microsoft.com/office/drawing/2014/main" id="{50DD433F-A0C9-B8F2-D25C-2CA3B1C5F85C}"/>
-              </a:ext>
-            </a:extLst>
-          </p:cNvPr>
-          <p:cNvSpPr>
-            <a:spLocks noGrp="1"/>
-          </p:cNvSpPr>
-          <p:nvPr>
-            <p:ph idx="1"/>
-          </p:nvPr>
-        </p:nvSpPr>
-        <p:spPr>
-          <a:xfrm>
-            <a:off x="630936" y="2807208"/>
-            <a:ext cx="3429000" cy="3410712"/>
-          </a:xfrm>
-        </p:spPr>
-        <p:txBody>
-          <a:bodyPr vert="horz" lIns="91440" tIns="45720" rIns="91440" bIns="45720" rtlCol="0" anchor="t">
-            <a:normAutofit/>
-          </a:bodyPr>
-          <a:lstStyle/>
-          <a:p>
-            <a:r>
-              <a:rPr lang="en-US" sz="2200"/>
-              <a:t>This big graph contains the average time for each algorithm to find the best path to our target node (100-999).</a:t>
-            </a:r>
-          </a:p>
-          <a:p>
-            <a:r>
-              <a:rPr lang="en-US" sz="2200"/>
-              <a:t>These times are a calculated average between 3 runs.</a:t>
+              <a:rPr lang="en-US" sz="4000">
+                <a:solidFill>
+                  <a:srgbClr val="FFFFFF"/>
+                </a:solidFill>
+              </a:rPr>
+              <a:t>Small Size Runtime</a:t>
             </a:r>
           </a:p>
         </p:txBody>
       </p:sp>
       <p:pic>
         <p:nvPicPr>
-          <p:cNvPr id="5" name="Content Placeholder 3">
+          <p:cNvPr id="4" name="Picture 3" descr="A graph of blue bars&#10;&#10;AI-generated content may be incorrect.">
             <a:extLst>
               <a:ext uri="{FF2B5EF4-FFF2-40B4-BE49-F238E27FC236}">
-                <a16:creationId xmlns:a16="http://schemas.microsoft.com/office/drawing/2014/main" id="{C956607C-6A51-4FF0-6880-D483FF2EB6BB}"/>
+                <a16:creationId xmlns:a16="http://schemas.microsoft.com/office/drawing/2014/main" id="{FBA4D28A-5A5D-E5D0-4C02-20CAE000F933}"/>
               </a:ext>
             </a:extLst>
           </p:cNvPr>
@@ -31106,8 +33596,38 @@
         </p:blipFill>
         <p:spPr>
           <a:xfrm>
-            <a:off x="4654296" y="1354212"/>
-            <a:ext cx="6903720" cy="4149576"/>
+            <a:off x="715748" y="2256086"/>
+            <a:ext cx="5131088" cy="3848316"/>
+          </a:xfrm>
+          <a:prstGeom prst="rect">
+            <a:avLst/>
+          </a:prstGeom>
+        </p:spPr>
+      </p:pic>
+      <p:pic>
+        <p:nvPicPr>
+          <p:cNvPr id="3" name="Picture 2">
+            <a:extLst>
+              <a:ext uri="{FF2B5EF4-FFF2-40B4-BE49-F238E27FC236}">
+                <a16:creationId xmlns:a16="http://schemas.microsoft.com/office/drawing/2014/main" id="{BA919339-33EA-BE55-8C25-23BCCA6A21EB}"/>
+              </a:ext>
+            </a:extLst>
+          </p:cNvPr>
+          <p:cNvPicPr>
+            <a:picLocks noChangeAspect="1"/>
+          </p:cNvPicPr>
+          <p:nvPr/>
+        </p:nvPicPr>
+        <p:blipFill>
+          <a:blip r:embed="rId3"/>
+          <a:stretch>
+            <a:fillRect/>
+          </a:stretch>
+        </p:blipFill>
+        <p:spPr>
+          <a:xfrm>
+            <a:off x="6345165" y="2292573"/>
+            <a:ext cx="5131087" cy="3848315"/>
           </a:xfrm>
           <a:prstGeom prst="rect">
             <a:avLst/>
@@ -31117,7 +33637,7 @@
     </p:spTree>
     <p:extLst>
       <p:ext uri="{BB962C8B-B14F-4D97-AF65-F5344CB8AC3E}">
-        <p14:creationId xmlns:p14="http://schemas.microsoft.com/office/powerpoint/2010/main" val="2679537060"/>
+        <p14:creationId xmlns:p14="http://schemas.microsoft.com/office/powerpoint/2010/main" val="2056095916"/>
       </p:ext>
     </p:extLst>
   </p:cSld>
@@ -31140,7 +33660,13 @@
     </p:bg>
     <p:spTree>
       <p:nvGrpSpPr>
-        <p:cNvPr id="1" name=""/>
+        <p:cNvPr id="1" name="">
+          <a:extLst>
+            <a:ext uri="{FF2B5EF4-FFF2-40B4-BE49-F238E27FC236}">
+              <a16:creationId xmlns:a16="http://schemas.microsoft.com/office/drawing/2014/main" id="{03BCF471-B8B2-BF2B-7A96-56C7345EC601}"/>
+            </a:ext>
+          </a:extLst>
+        </p:cNvPr>
         <p:cNvGrpSpPr/>
         <p:nvPr/>
       </p:nvGrpSpPr>
@@ -31154,10 +33680,10 @@
       </p:grpSpPr>
       <p:sp useBgFill="1">
         <p:nvSpPr>
-          <p:cNvPr id="16" name="Rectangle 15">
+          <p:cNvPr id="40" name="Rectangle 39">
             <a:extLst>
               <a:ext uri="{FF2B5EF4-FFF2-40B4-BE49-F238E27FC236}">
-                <a16:creationId xmlns:a16="http://schemas.microsoft.com/office/drawing/2014/main" id="{13E6F87C-D8E3-439E-A691-67050AEC981E}"/>
+                <a16:creationId xmlns:a16="http://schemas.microsoft.com/office/drawing/2014/main" id="{2151139A-886F-4B97-8815-729AD3831BBD}"/>
               </a:ext>
               <a:ext uri="{C183D7F6-B498-43B3-948B-1728B52AA6E4}">
                 <adec:decorative xmlns:adec="http://schemas.microsoft.com/office/drawing/2017/decorative" val="1"/>
@@ -31183,6 +33709,97 @@
           <a:prstGeom prst="rect">
             <a:avLst/>
           </a:prstGeom>
+          <a:ln w="12700" cap="flat" cmpd="sng" algn="ctr">
+            <a:noFill/>
+            <a:prstDash val="solid"/>
+            <a:miter lim="800000"/>
+          </a:ln>
+          <a:effectLst/>
+          <a:extLst>
+            <a:ext uri="{91240B29-F687-4F45-9708-019B960494DF}">
+              <a14:hiddenLine xmlns:a14="http://schemas.microsoft.com/office/drawing/2010/main" w="12700" cap="flat" cmpd="sng" algn="ctr">
+                <a:solidFill>
+                  <a:schemeClr val="accent1">
+                    <a:shade val="50000"/>
+                  </a:schemeClr>
+                </a:solidFill>
+                <a:prstDash val="solid"/>
+                <a:miter lim="800000"/>
+              </a14:hiddenLine>
+            </a:ext>
+          </a:extLst>
+        </p:spPr>
+        <p:style>
+          <a:lnRef idx="2">
+            <a:schemeClr val="accent1">
+              <a:shade val="50000"/>
+            </a:schemeClr>
+          </a:lnRef>
+          <a:fillRef idx="1">
+            <a:schemeClr val="accent1"/>
+          </a:fillRef>
+          <a:effectRef idx="0">
+            <a:schemeClr val="accent1"/>
+          </a:effectRef>
+          <a:fontRef idx="minor">
+            <a:schemeClr val="lt1"/>
+          </a:fontRef>
+        </p:style>
+        <p:txBody>
+          <a:bodyPr rtlCol="0" anchor="ctr"/>
+          <a:lstStyle/>
+          <a:p>
+            <a:pPr algn="ctr"/>
+            <a:endParaRPr lang="en-US" sz="2000"/>
+          </a:p>
+        </p:txBody>
+      </p:sp>
+      <p:sp>
+        <p:nvSpPr>
+          <p:cNvPr id="42" name="Rectangle 41">
+            <a:extLst>
+              <a:ext uri="{FF2B5EF4-FFF2-40B4-BE49-F238E27FC236}">
+                <a16:creationId xmlns:a16="http://schemas.microsoft.com/office/drawing/2014/main" id="{AB5E08C4-8CDD-4623-A5B8-E998C6DEE3B7}"/>
+              </a:ext>
+              <a:ext uri="{C183D7F6-B498-43B3-948B-1728B52AA6E4}">
+                <adec:decorative xmlns:adec="http://schemas.microsoft.com/office/drawing/2017/decorative" val="1"/>
+              </a:ext>
+            </a:extLst>
+          </p:cNvPr>
+          <p:cNvSpPr>
+            <a:spLocks noGrp="1" noRot="1" noChangeAspect="1" noMove="1" noResize="1" noEditPoints="1" noAdjustHandles="1" noChangeArrowheads="1" noChangeShapeType="1" noTextEdit="1"/>
+          </p:cNvSpPr>
+          <p:nvPr>
+            <p:extLst>
+              <p:ext uri="{386F3935-93C4-4BCD-93E2-E3B085C9AB24}">
+                <p16:designElem xmlns:p16="http://schemas.microsoft.com/office/powerpoint/2015/main" val="1"/>
+              </p:ext>
+            </p:extLst>
+          </p:nvPr>
+        </p:nvSpPr>
+        <p:spPr>
+          <a:xfrm flipH="1">
+            <a:off x="2" y="492"/>
+            <a:ext cx="12191998" cy="1575955"/>
+          </a:xfrm>
+          <a:prstGeom prst="rect">
+            <a:avLst/>
+          </a:prstGeom>
+          <a:gradFill>
+            <a:gsLst>
+              <a:gs pos="0">
+                <a:schemeClr val="accent1">
+                  <a:lumMod val="50000"/>
+                </a:schemeClr>
+              </a:gs>
+              <a:gs pos="100000">
+                <a:schemeClr val="accent1">
+                  <a:lumMod val="75000"/>
+                </a:schemeClr>
+              </a:gs>
+            </a:gsLst>
+            <a:lin ang="8400000" scaled="0"/>
+          </a:gradFill>
           <a:ln>
             <a:noFill/>
           </a:ln>
@@ -31214,10 +33831,10 @@
       </p:sp>
       <p:sp>
         <p:nvSpPr>
-          <p:cNvPr id="17" name="Rectangle 16">
+          <p:cNvPr id="44" name="Rectangle 43">
             <a:extLst>
               <a:ext uri="{FF2B5EF4-FFF2-40B4-BE49-F238E27FC236}">
-                <a16:creationId xmlns:a16="http://schemas.microsoft.com/office/drawing/2014/main" id="{158B3569-73B2-4D05-8E95-886A6EE17F1F}"/>
+                <a16:creationId xmlns:a16="http://schemas.microsoft.com/office/drawing/2014/main" id="{15F33878-D502-4FFA-8ACE-F2AECDB2A23F}"/>
               </a:ext>
               <a:ext uri="{C183D7F6-B498-43B3-948B-1728B52AA6E4}">
                 <adec:decorative xmlns:adec="http://schemas.microsoft.com/office/drawing/2017/decorative" val="1"/>
@@ -31236,24 +33853,28 @@
           </p:nvPr>
         </p:nvSpPr>
         <p:spPr>
-          <a:xfrm>
-            <a:off x="0" y="0"/>
-            <a:ext cx="12192000" cy="6858000"/>
+          <a:xfrm rot="10800000" flipH="1">
+            <a:off x="8128857" y="35"/>
+            <a:ext cx="4063143" cy="1576412"/>
           </a:xfrm>
           <a:prstGeom prst="rect">
             <a:avLst/>
           </a:prstGeom>
-          <a:gradFill flip="none" rotWithShape="1">
+          <a:gradFill>
             <a:gsLst>
-              <a:gs pos="0">
-                <a:schemeClr val="accent1"/>
+              <a:gs pos="19000">
+                <a:schemeClr val="accent1">
+                  <a:lumMod val="50000"/>
+                  <a:alpha val="68000"/>
+                </a:schemeClr>
               </a:gs>
               <a:gs pos="100000">
-                <a:schemeClr val="accent2"/>
+                <a:schemeClr val="accent1">
+                  <a:alpha val="79000"/>
+                </a:schemeClr>
               </a:gs>
             </a:gsLst>
-            <a:lin ang="2700000" scaled="1"/>
-            <a:tileRect/>
+            <a:lin ang="19200000" scaled="0"/>
           </a:gradFill>
           <a:ln>
             <a:noFill/>
@@ -31280,109 +33901,91 @@
           <a:lstStyle/>
           <a:p>
             <a:pPr algn="ctr"/>
-            <a:endParaRPr lang="en-US">
-              <a:solidFill>
-                <a:srgbClr val="FFFFFF"/>
-              </a:solidFill>
-            </a:endParaRPr>
+            <a:endParaRPr lang="en-US"/>
           </a:p>
         </p:txBody>
       </p:sp>
       <p:sp>
         <p:nvSpPr>
-          <p:cNvPr id="2" name="Title 1">
+          <p:cNvPr id="46" name="Rectangle 45">
             <a:extLst>
               <a:ext uri="{FF2B5EF4-FFF2-40B4-BE49-F238E27FC236}">
-                <a16:creationId xmlns:a16="http://schemas.microsoft.com/office/drawing/2014/main" id="{49483133-EF8E-3D36-2958-8930E30B77BC}"/>
+                <a16:creationId xmlns:a16="http://schemas.microsoft.com/office/drawing/2014/main" id="{D3539FEE-81D3-4406-802E-60B20B16F4F6}"/>
+              </a:ext>
+              <a:ext uri="{C183D7F6-B498-43B3-948B-1728B52AA6E4}">
+                <adec:decorative xmlns:adec="http://schemas.microsoft.com/office/drawing/2017/decorative" val="1"/>
               </a:ext>
             </a:extLst>
           </p:cNvPr>
           <p:cNvSpPr>
-            <a:spLocks noGrp="1"/>
+            <a:spLocks noGrp="1" noRot="1" noChangeAspect="1" noMove="1" noResize="1" noEditPoints="1" noAdjustHandles="1" noChangeArrowheads="1" noChangeShapeType="1" noTextEdit="1"/>
           </p:cNvSpPr>
           <p:nvPr>
-            <p:ph type="title"/>
+            <p:extLst>
+              <p:ext uri="{386F3935-93C4-4BCD-93E2-E3B085C9AB24}">
+                <p16:designElem xmlns:p16="http://schemas.microsoft.com/office/powerpoint/2015/main" val="1"/>
+              </p:ext>
+            </p:extLst>
           </p:nvPr>
         </p:nvSpPr>
         <p:spPr>
-          <a:xfrm>
-            <a:off x="457200" y="1598246"/>
-            <a:ext cx="4412419" cy="3626217"/>
+          <a:xfrm rot="5400000">
+            <a:off x="5307778" y="-5307777"/>
+            <a:ext cx="1576446" cy="12192001"/>
           </a:xfrm>
+          <a:prstGeom prst="rect">
+            <a:avLst/>
+          </a:prstGeom>
+          <a:gradFill>
+            <a:gsLst>
+              <a:gs pos="16000">
+                <a:srgbClr val="000000">
+                  <a:alpha val="0"/>
+                </a:srgbClr>
+              </a:gs>
+              <a:gs pos="99000">
+                <a:srgbClr val="000000">
+                  <a:alpha val="87000"/>
+                </a:srgbClr>
+              </a:gs>
+            </a:gsLst>
+            <a:lin ang="11400000" scaled="0"/>
+          </a:gradFill>
+          <a:ln>
+            <a:noFill/>
+          </a:ln>
         </p:spPr>
+        <p:style>
+          <a:lnRef idx="2">
+            <a:schemeClr val="accent1">
+              <a:shade val="50000"/>
+            </a:schemeClr>
+          </a:lnRef>
+          <a:fillRef idx="1">
+            <a:schemeClr val="accent1"/>
+          </a:fillRef>
+          <a:effectRef idx="0">
+            <a:schemeClr val="accent1"/>
+          </a:effectRef>
+          <a:fontRef idx="minor">
+            <a:schemeClr val="lt1"/>
+          </a:fontRef>
+        </p:style>
         <p:txBody>
-          <a:bodyPr vert="horz" lIns="91440" tIns="45720" rIns="91440" bIns="45720" rtlCol="0" anchor="t">
-            <a:normAutofit/>
-          </a:bodyPr>
+          <a:bodyPr rtlCol="0" anchor="ctr"/>
           <a:lstStyle/>
           <a:p>
-            <a:pPr algn="r"/>
-            <a:r>
-              <a:rPr lang="en-US" sz="8000">
-                <a:solidFill>
-                  <a:srgbClr val="FFFFFF"/>
-                </a:solidFill>
-              </a:rPr>
-              <a:t>Tables</a:t>
-            </a:r>
+            <a:pPr algn="ctr"/>
+            <a:endParaRPr lang="en-US" dirty="0"/>
           </a:p>
         </p:txBody>
       </p:sp>
       <p:sp>
         <p:nvSpPr>
-          <p:cNvPr id="14" name="TextBox 13">
+          <p:cNvPr id="48" name="Rectangle 47">
             <a:extLst>
               <a:ext uri="{FF2B5EF4-FFF2-40B4-BE49-F238E27FC236}">
-                <a16:creationId xmlns:a16="http://schemas.microsoft.com/office/drawing/2014/main" id="{D92485EE-6AE2-F719-DCF3-3DDEF367501A}"/>
-              </a:ext>
-            </a:extLst>
-          </p:cNvPr>
-          <p:cNvSpPr txBox="1"/>
-          <p:nvPr/>
-        </p:nvSpPr>
-        <p:spPr>
-          <a:xfrm>
-            <a:off x="457200" y="5350213"/>
-            <a:ext cx="4412417" cy="1031537"/>
-          </a:xfrm>
-          <a:prstGeom prst="rect">
-            <a:avLst/>
-          </a:prstGeom>
-        </p:spPr>
-        <p:txBody>
-          <a:bodyPr rot="0" spcFirstLastPara="0" vertOverflow="overflow" horzOverflow="overflow" vert="horz" lIns="91440" tIns="45720" rIns="91440" bIns="45720" numCol="1" spcCol="0" rtlCol="0" fromWordArt="0" anchorCtr="0" forceAA="0" compatLnSpc="1">
-            <a:prstTxWarp prst="textNoShape">
-              <a:avLst/>
-            </a:prstTxWarp>
-            <a:normAutofit/>
-          </a:bodyPr>
-          <a:lstStyle/>
-          <a:p>
-            <a:pPr algn="r">
-              <a:lnSpc>
-                <a:spcPct val="90000"/>
-              </a:lnSpc>
-              <a:spcBef>
-                <a:spcPts val="1000"/>
-              </a:spcBef>
-            </a:pPr>
-            <a:r>
-              <a:rPr lang="en-US" sz="2200">
-                <a:solidFill>
-                  <a:srgbClr val="FFFFFF"/>
-                </a:solidFill>
-              </a:rPr>
-              <a:t>These are the tables the correlate with the graph on the previous slide.</a:t>
-            </a:r>
-          </a:p>
-        </p:txBody>
-      </p:sp>
-      <p:sp>
-        <p:nvSpPr>
-          <p:cNvPr id="18" name="Graphic 17">
-            <a:extLst>
-              <a:ext uri="{FF2B5EF4-FFF2-40B4-BE49-F238E27FC236}">
-                <a16:creationId xmlns:a16="http://schemas.microsoft.com/office/drawing/2014/main" id="{B71758F4-3F46-45DA-8AC5-4E508DA080BA}"/>
+                <a16:creationId xmlns:a16="http://schemas.microsoft.com/office/drawing/2014/main" id="{DC701763-729E-462F-A5A8-E0DEFEB1E2E4}"/>
               </a:ext>
               <a:ext uri="{C183D7F6-B498-43B3-948B-1728B52AA6E4}">
                 <adec:decorative xmlns:adec="http://schemas.microsoft.com/office/drawing/2017/decorative" val="1"/>
@@ -31402,255 +34005,102 @@
         </p:nvSpPr>
         <p:spPr>
           <a:xfrm>
-            <a:off x="11512034" y="1267063"/>
-            <a:ext cx="139037" cy="139039"/>
+            <a:off x="3825434" y="986"/>
+            <a:ext cx="4303422" cy="1575461"/>
           </a:xfrm>
-          <a:custGeom>
-            <a:avLst/>
-            <a:gdLst>
-              <a:gd name="connsiteX0" fmla="*/ 129600 w 139037"/>
-              <a:gd name="connsiteY0" fmla="*/ 60082 h 139039"/>
-              <a:gd name="connsiteX1" fmla="*/ 78955 w 139037"/>
-              <a:gd name="connsiteY1" fmla="*/ 60082 h 139039"/>
-              <a:gd name="connsiteX2" fmla="*/ 78955 w 139037"/>
-              <a:gd name="connsiteY2" fmla="*/ 9437 h 139039"/>
-              <a:gd name="connsiteX3" fmla="*/ 69519 w 139037"/>
-              <a:gd name="connsiteY3" fmla="*/ 0 h 139039"/>
-              <a:gd name="connsiteX4" fmla="*/ 60082 w 139037"/>
-              <a:gd name="connsiteY4" fmla="*/ 9437 h 139039"/>
-              <a:gd name="connsiteX5" fmla="*/ 60082 w 139037"/>
-              <a:gd name="connsiteY5" fmla="*/ 60082 h 139039"/>
-              <a:gd name="connsiteX6" fmla="*/ 9437 w 139037"/>
-              <a:gd name="connsiteY6" fmla="*/ 60082 h 139039"/>
-              <a:gd name="connsiteX7" fmla="*/ 0 w 139037"/>
-              <a:gd name="connsiteY7" fmla="*/ 69520 h 139039"/>
-              <a:gd name="connsiteX8" fmla="*/ 9437 w 139037"/>
-              <a:gd name="connsiteY8" fmla="*/ 78957 h 139039"/>
-              <a:gd name="connsiteX9" fmla="*/ 60082 w 139037"/>
-              <a:gd name="connsiteY9" fmla="*/ 78957 h 139039"/>
-              <a:gd name="connsiteX10" fmla="*/ 60082 w 139037"/>
-              <a:gd name="connsiteY10" fmla="*/ 129602 h 139039"/>
-              <a:gd name="connsiteX11" fmla="*/ 69519 w 139037"/>
-              <a:gd name="connsiteY11" fmla="*/ 139039 h 139039"/>
-              <a:gd name="connsiteX12" fmla="*/ 78955 w 139037"/>
-              <a:gd name="connsiteY12" fmla="*/ 129602 h 139039"/>
-              <a:gd name="connsiteX13" fmla="*/ 78955 w 139037"/>
-              <a:gd name="connsiteY13" fmla="*/ 78957 h 139039"/>
-              <a:gd name="connsiteX14" fmla="*/ 129600 w 139037"/>
-              <a:gd name="connsiteY14" fmla="*/ 78957 h 139039"/>
-              <a:gd name="connsiteX15" fmla="*/ 139037 w 139037"/>
-              <a:gd name="connsiteY15" fmla="*/ 69520 h 139039"/>
-              <a:gd name="connsiteX16" fmla="*/ 129600 w 139037"/>
-              <a:gd name="connsiteY16" fmla="*/ 60082 h 139039"/>
-            </a:gdLst>
-            <a:ahLst/>
-            <a:cxnLst>
-              <a:cxn ang="0">
-                <a:pos x="connsiteX0" y="connsiteY0"/>
-              </a:cxn>
-              <a:cxn ang="0">
-                <a:pos x="connsiteX1" y="connsiteY1"/>
-              </a:cxn>
-              <a:cxn ang="0">
-                <a:pos x="connsiteX2" y="connsiteY2"/>
-              </a:cxn>
-              <a:cxn ang="0">
-                <a:pos x="connsiteX3" y="connsiteY3"/>
-              </a:cxn>
-              <a:cxn ang="0">
-                <a:pos x="connsiteX4" y="connsiteY4"/>
-              </a:cxn>
-              <a:cxn ang="0">
-                <a:pos x="connsiteX5" y="connsiteY5"/>
-              </a:cxn>
-              <a:cxn ang="0">
-                <a:pos x="connsiteX6" y="connsiteY6"/>
-              </a:cxn>
-              <a:cxn ang="0">
-                <a:pos x="connsiteX7" y="connsiteY7"/>
-              </a:cxn>
-              <a:cxn ang="0">
-                <a:pos x="connsiteX8" y="connsiteY8"/>
-              </a:cxn>
-              <a:cxn ang="0">
-                <a:pos x="connsiteX9" y="connsiteY9"/>
-              </a:cxn>
-              <a:cxn ang="0">
-                <a:pos x="connsiteX10" y="connsiteY10"/>
-              </a:cxn>
-              <a:cxn ang="0">
-                <a:pos x="connsiteX11" y="connsiteY11"/>
-              </a:cxn>
-              <a:cxn ang="0">
-                <a:pos x="connsiteX12" y="connsiteY12"/>
-              </a:cxn>
-              <a:cxn ang="0">
-                <a:pos x="connsiteX13" y="connsiteY13"/>
-              </a:cxn>
-              <a:cxn ang="0">
-                <a:pos x="connsiteX14" y="connsiteY14"/>
-              </a:cxn>
-              <a:cxn ang="0">
-                <a:pos x="connsiteX15" y="connsiteY15"/>
-              </a:cxn>
-              <a:cxn ang="0">
-                <a:pos x="connsiteX16" y="connsiteY16"/>
-              </a:cxn>
-            </a:cxnLst>
-            <a:rect l="l" t="t" r="r" b="b"/>
-            <a:pathLst>
-              <a:path w="139037" h="139039">
-                <a:moveTo>
-                  <a:pt x="129600" y="60082"/>
-                </a:moveTo>
-                <a:lnTo>
-                  <a:pt x="78955" y="60082"/>
-                </a:lnTo>
-                <a:lnTo>
-                  <a:pt x="78955" y="9437"/>
-                </a:lnTo>
-                <a:cubicBezTo>
-                  <a:pt x="78955" y="4225"/>
-                  <a:pt x="74730" y="0"/>
-                  <a:pt x="69519" y="0"/>
-                </a:cubicBezTo>
-                <a:cubicBezTo>
-                  <a:pt x="64307" y="0"/>
-                  <a:pt x="60082" y="4225"/>
-                  <a:pt x="60082" y="9437"/>
-                </a:cubicBezTo>
-                <a:lnTo>
-                  <a:pt x="60082" y="60082"/>
-                </a:lnTo>
-                <a:lnTo>
-                  <a:pt x="9437" y="60082"/>
-                </a:lnTo>
-                <a:cubicBezTo>
-                  <a:pt x="4225" y="60082"/>
-                  <a:pt x="0" y="64308"/>
-                  <a:pt x="0" y="69520"/>
-                </a:cubicBezTo>
-                <a:cubicBezTo>
-                  <a:pt x="0" y="74731"/>
-                  <a:pt x="4225" y="78957"/>
-                  <a:pt x="9437" y="78957"/>
-                </a:cubicBezTo>
-                <a:lnTo>
-                  <a:pt x="60082" y="78957"/>
-                </a:lnTo>
-                <a:lnTo>
-                  <a:pt x="60082" y="129602"/>
-                </a:lnTo>
-                <a:cubicBezTo>
-                  <a:pt x="60082" y="134814"/>
-                  <a:pt x="64307" y="139039"/>
-                  <a:pt x="69519" y="139039"/>
-                </a:cubicBezTo>
-                <a:cubicBezTo>
-                  <a:pt x="74730" y="139039"/>
-                  <a:pt x="78955" y="134814"/>
-                  <a:pt x="78955" y="129602"/>
-                </a:cubicBezTo>
-                <a:lnTo>
-                  <a:pt x="78955" y="78957"/>
-                </a:lnTo>
-                <a:lnTo>
-                  <a:pt x="129600" y="78957"/>
-                </a:lnTo>
-                <a:cubicBezTo>
-                  <a:pt x="134812" y="78957"/>
-                  <a:pt x="139037" y="74731"/>
-                  <a:pt x="139037" y="69520"/>
-                </a:cubicBezTo>
-                <a:cubicBezTo>
-                  <a:pt x="139037" y="64308"/>
-                  <a:pt x="134812" y="60082"/>
-                  <a:pt x="129600" y="60082"/>
-                </a:cubicBezTo>
-                <a:close/>
-              </a:path>
-            </a:pathLst>
-          </a:custGeom>
-          <a:solidFill>
-            <a:srgbClr val="FFFFFF"/>
-          </a:solidFill>
-          <a:ln w="603" cap="flat">
-            <a:noFill/>
-            <a:prstDash val="solid"/>
-            <a:miter/>
-          </a:ln>
-        </p:spPr>
-        <p:txBody>
-          <a:bodyPr rtlCol="0" anchor="ctr"/>
-          <a:lstStyle/>
-          <a:p>
-            <a:endParaRPr lang="en-US">
-              <a:solidFill>
-                <a:srgbClr val="FFFFFF"/>
-              </a:solidFill>
-            </a:endParaRPr>
-          </a:p>
-        </p:txBody>
-      </p:sp>
-      <p:cxnSp>
-        <p:nvCxnSpPr>
-          <p:cNvPr id="20" name="Straight Connector 19">
-            <a:extLst>
-              <a:ext uri="{FF2B5EF4-FFF2-40B4-BE49-F238E27FC236}">
-                <a16:creationId xmlns:a16="http://schemas.microsoft.com/office/drawing/2014/main" id="{56020367-4FD5-4596-8E10-C5F095CD8DBF}"/>
-              </a:ext>
-              <a:ext uri="{C183D7F6-B498-43B3-948B-1728B52AA6E4}">
-                <adec:decorative xmlns:adec="http://schemas.microsoft.com/office/drawing/2017/decorative" val="1"/>
-              </a:ext>
-            </a:extLst>
-          </p:cNvPr>
-          <p:cNvCxnSpPr>
-            <a:cxnSpLocks noGrp="1" noRot="1" noChangeAspect="1" noMove="1" noResize="1" noEditPoints="1" noAdjustHandles="1" noChangeArrowheads="1" noChangeShapeType="1"/>
-          </p:cNvCxnSpPr>
-          <p:nvPr>
-            <p:extLst>
-              <p:ext uri="{386F3935-93C4-4BCD-93E2-E3B085C9AB24}">
-                <p16:designElem xmlns:p16="http://schemas.microsoft.com/office/powerpoint/2015/main" val="1"/>
-              </p:ext>
-            </p:extLst>
-          </p:nvPr>
-        </p:nvCxnSpPr>
-        <p:spPr>
-          <a:xfrm>
-            <a:off x="5447322" y="1589368"/>
-            <a:ext cx="0" cy="5259754"/>
-          </a:xfrm>
-          <a:prstGeom prst="line">
+          <a:prstGeom prst="rect">
             <a:avLst/>
           </a:prstGeom>
-          <a:ln w="25400" cap="sq">
-            <a:solidFill>
-              <a:srgbClr val="FFFFFF"/>
-            </a:solidFill>
-            <a:bevel/>
+          <a:gradFill>
+            <a:gsLst>
+              <a:gs pos="0">
+                <a:schemeClr val="accent1">
+                  <a:alpha val="17000"/>
+                </a:schemeClr>
+              </a:gs>
+              <a:gs pos="74000">
+                <a:schemeClr val="accent1">
+                  <a:lumMod val="50000"/>
+                  <a:alpha val="0"/>
+                </a:schemeClr>
+              </a:gs>
+            </a:gsLst>
+            <a:lin ang="14400000" scaled="0"/>
+          </a:gradFill>
+          <a:ln>
+            <a:noFill/>
           </a:ln>
         </p:spPr>
         <p:style>
-          <a:lnRef idx="1">
-            <a:schemeClr val="accent1"/>
+          <a:lnRef idx="2">
+            <a:schemeClr val="accent1">
+              <a:shade val="50000"/>
+            </a:schemeClr>
           </a:lnRef>
-          <a:fillRef idx="0">
+          <a:fillRef idx="1">
             <a:schemeClr val="accent1"/>
           </a:fillRef>
           <a:effectRef idx="0">
             <a:schemeClr val="accent1"/>
           </a:effectRef>
           <a:fontRef idx="minor">
-            <a:schemeClr val="tx1"/>
+            <a:schemeClr val="lt1"/>
           </a:fontRef>
         </p:style>
-      </p:cxnSp>
+        <p:txBody>
+          <a:bodyPr rtlCol="0" anchor="ctr"/>
+          <a:lstStyle/>
+          <a:p>
+            <a:pPr algn="ctr"/>
+            <a:endParaRPr lang="en-US"/>
+          </a:p>
+        </p:txBody>
+      </p:sp>
+      <p:sp>
+        <p:nvSpPr>
+          <p:cNvPr id="2" name="Title 1">
+            <a:extLst>
+              <a:ext uri="{FF2B5EF4-FFF2-40B4-BE49-F238E27FC236}">
+                <a16:creationId xmlns:a16="http://schemas.microsoft.com/office/drawing/2014/main" id="{20F97B8A-85E8-E2A5-557B-FC49025C4984}"/>
+              </a:ext>
+            </a:extLst>
+          </p:cNvPr>
+          <p:cNvSpPr>
+            <a:spLocks noGrp="1"/>
+          </p:cNvSpPr>
+          <p:nvPr>
+            <p:ph type="title"/>
+          </p:nvPr>
+        </p:nvSpPr>
+        <p:spPr>
+          <a:xfrm>
+            <a:off x="699714" y="353160"/>
+            <a:ext cx="7091300" cy="898581"/>
+          </a:xfrm>
+        </p:spPr>
+        <p:txBody>
+          <a:bodyPr vert="horz" lIns="91440" tIns="45720" rIns="91440" bIns="45720" rtlCol="0" anchor="ctr">
+            <a:normAutofit/>
+          </a:bodyPr>
+          <a:lstStyle/>
+          <a:p>
+            <a:r>
+              <a:rPr lang="en-US" sz="4000">
+                <a:solidFill>
+                  <a:srgbClr val="FFFFFF"/>
+                </a:solidFill>
+              </a:rPr>
+              <a:t>Medium Size Runtime</a:t>
+            </a:r>
+          </a:p>
+        </p:txBody>
+      </p:sp>
       <p:pic>
         <p:nvPicPr>
-          <p:cNvPr id="11" name="Picture 10" descr="A screenshot of a computer&#10;&#10;AI-generated content may be incorrect.">
+          <p:cNvPr id="6" name="Picture 5">
             <a:extLst>
               <a:ext uri="{FF2B5EF4-FFF2-40B4-BE49-F238E27FC236}">
-                <a16:creationId xmlns:a16="http://schemas.microsoft.com/office/drawing/2014/main" id="{90A28E79-DCD2-DFD1-003F-9A919779892A}"/>
+                <a16:creationId xmlns:a16="http://schemas.microsoft.com/office/drawing/2014/main" id="{7A768C59-B91D-7ED4-7A92-05D58524A450}"/>
               </a:ext>
             </a:extLst>
           </p:cNvPr>
@@ -31667,179 +34117,20 @@
         </p:blipFill>
         <p:spPr>
           <a:xfrm>
-            <a:off x="5916914" y="1645161"/>
-            <a:ext cx="5354583" cy="1112257"/>
+            <a:off x="715748" y="2256086"/>
+            <a:ext cx="5131088" cy="3848316"/>
           </a:xfrm>
           <a:prstGeom prst="rect">
             <a:avLst/>
           </a:prstGeom>
         </p:spPr>
       </p:pic>
-      <p:sp>
-        <p:nvSpPr>
-          <p:cNvPr id="22" name="Graphic 21">
+      <p:pic>
+        <p:nvPicPr>
+          <p:cNvPr id="5" name="Picture 4">
             <a:extLst>
               <a:ext uri="{FF2B5EF4-FFF2-40B4-BE49-F238E27FC236}">
-                <a16:creationId xmlns:a16="http://schemas.microsoft.com/office/drawing/2014/main" id="{8D61482F-F3C5-4D66-8C5D-C6BBE3E1275C}"/>
-              </a:ext>
-              <a:ext uri="{C183D7F6-B498-43B3-948B-1728B52AA6E4}">
-                <adec:decorative xmlns:adec="http://schemas.microsoft.com/office/drawing/2017/decorative" val="1"/>
-              </a:ext>
-            </a:extLst>
-          </p:cNvPr>
-          <p:cNvSpPr>
-            <a:spLocks noGrp="1" noRot="1" noChangeAspect="1" noMove="1" noResize="1" noEditPoints="1" noAdjustHandles="1" noChangeArrowheads="1" noChangeShapeType="1" noTextEdit="1"/>
-          </p:cNvSpPr>
-          <p:nvPr>
-            <p:extLst>
-              <p:ext uri="{386F3935-93C4-4BCD-93E2-E3B085C9AB24}">
-                <p16:designElem xmlns:p16="http://schemas.microsoft.com/office/powerpoint/2015/main" val="1"/>
-              </p:ext>
-            </p:extLst>
-          </p:nvPr>
-        </p:nvSpPr>
-        <p:spPr>
-          <a:xfrm>
-            <a:off x="11752801" y="1659316"/>
-            <a:ext cx="127713" cy="127714"/>
-          </a:xfrm>
-          <a:custGeom>
-            <a:avLst/>
-            <a:gdLst>
-              <a:gd name="connsiteX0" fmla="*/ 63857 w 127713"/>
-              <a:gd name="connsiteY0" fmla="*/ 18874 h 127714"/>
-              <a:gd name="connsiteX1" fmla="*/ 108839 w 127713"/>
-              <a:gd name="connsiteY1" fmla="*/ 63857 h 127714"/>
-              <a:gd name="connsiteX2" fmla="*/ 63857 w 127713"/>
-              <a:gd name="connsiteY2" fmla="*/ 108840 h 127714"/>
-              <a:gd name="connsiteX3" fmla="*/ 18874 w 127713"/>
-              <a:gd name="connsiteY3" fmla="*/ 63857 h 127714"/>
-              <a:gd name="connsiteX4" fmla="*/ 63857 w 127713"/>
-              <a:gd name="connsiteY4" fmla="*/ 18874 h 127714"/>
-              <a:gd name="connsiteX5" fmla="*/ 63857 w 127713"/>
-              <a:gd name="connsiteY5" fmla="*/ 0 h 127714"/>
-              <a:gd name="connsiteX6" fmla="*/ 0 w 127713"/>
-              <a:gd name="connsiteY6" fmla="*/ 63857 h 127714"/>
-              <a:gd name="connsiteX7" fmla="*/ 63857 w 127713"/>
-              <a:gd name="connsiteY7" fmla="*/ 127714 h 127714"/>
-              <a:gd name="connsiteX8" fmla="*/ 127713 w 127713"/>
-              <a:gd name="connsiteY8" fmla="*/ 63857 h 127714"/>
-              <a:gd name="connsiteX9" fmla="*/ 63857 w 127713"/>
-              <a:gd name="connsiteY9" fmla="*/ 0 h 127714"/>
-            </a:gdLst>
-            <a:ahLst/>
-            <a:cxnLst>
-              <a:cxn ang="0">
-                <a:pos x="connsiteX0" y="connsiteY0"/>
-              </a:cxn>
-              <a:cxn ang="0">
-                <a:pos x="connsiteX1" y="connsiteY1"/>
-              </a:cxn>
-              <a:cxn ang="0">
-                <a:pos x="connsiteX2" y="connsiteY2"/>
-              </a:cxn>
-              <a:cxn ang="0">
-                <a:pos x="connsiteX3" y="connsiteY3"/>
-              </a:cxn>
-              <a:cxn ang="0">
-                <a:pos x="connsiteX4" y="connsiteY4"/>
-              </a:cxn>
-              <a:cxn ang="0">
-                <a:pos x="connsiteX5" y="connsiteY5"/>
-              </a:cxn>
-              <a:cxn ang="0">
-                <a:pos x="connsiteX6" y="connsiteY6"/>
-              </a:cxn>
-              <a:cxn ang="0">
-                <a:pos x="connsiteX7" y="connsiteY7"/>
-              </a:cxn>
-              <a:cxn ang="0">
-                <a:pos x="connsiteX8" y="connsiteY8"/>
-              </a:cxn>
-              <a:cxn ang="0">
-                <a:pos x="connsiteX9" y="connsiteY9"/>
-              </a:cxn>
-            </a:cxnLst>
-            <a:rect l="l" t="t" r="r" b="b"/>
-            <a:pathLst>
-              <a:path w="127713" h="127714">
-                <a:moveTo>
-                  <a:pt x="63857" y="18874"/>
-                </a:moveTo>
-                <a:cubicBezTo>
-                  <a:pt x="88700" y="18874"/>
-                  <a:pt x="108839" y="39014"/>
-                  <a:pt x="108839" y="63857"/>
-                </a:cubicBezTo>
-                <a:cubicBezTo>
-                  <a:pt x="108839" y="88700"/>
-                  <a:pt x="88700" y="108840"/>
-                  <a:pt x="63857" y="108840"/>
-                </a:cubicBezTo>
-                <a:cubicBezTo>
-                  <a:pt x="39013" y="108840"/>
-                  <a:pt x="18874" y="88700"/>
-                  <a:pt x="18874" y="63857"/>
-                </a:cubicBezTo>
-                <a:cubicBezTo>
-                  <a:pt x="18898" y="39024"/>
-                  <a:pt x="39023" y="18898"/>
-                  <a:pt x="63857" y="18874"/>
-                </a:cubicBezTo>
-                <a:moveTo>
-                  <a:pt x="63857" y="0"/>
-                </a:moveTo>
-                <a:cubicBezTo>
-                  <a:pt x="28590" y="0"/>
-                  <a:pt x="0" y="28590"/>
-                  <a:pt x="0" y="63857"/>
-                </a:cubicBezTo>
-                <a:cubicBezTo>
-                  <a:pt x="0" y="99124"/>
-                  <a:pt x="28590" y="127714"/>
-                  <a:pt x="63857" y="127714"/>
-                </a:cubicBezTo>
-                <a:cubicBezTo>
-                  <a:pt x="99124" y="127714"/>
-                  <a:pt x="127713" y="99124"/>
-                  <a:pt x="127713" y="63857"/>
-                </a:cubicBezTo>
-                <a:cubicBezTo>
-                  <a:pt x="127713" y="28590"/>
-                  <a:pt x="99124" y="0"/>
-                  <a:pt x="63857" y="0"/>
-                </a:cubicBezTo>
-                <a:close/>
-              </a:path>
-            </a:pathLst>
-          </a:custGeom>
-          <a:solidFill>
-            <a:srgbClr val="FFFFFF"/>
-          </a:solidFill>
-          <a:ln w="610" cap="flat">
-            <a:noFill/>
-            <a:prstDash val="solid"/>
-            <a:miter/>
-          </a:ln>
-        </p:spPr>
-        <p:txBody>
-          <a:bodyPr rtlCol="0" anchor="ctr"/>
-          <a:lstStyle/>
-          <a:p>
-            <a:endParaRPr lang="en-US">
-              <a:solidFill>
-                <a:srgbClr val="FFFFFF"/>
-              </a:solidFill>
-            </a:endParaRPr>
-          </a:p>
-        </p:txBody>
-      </p:sp>
-      <p:pic>
-        <p:nvPicPr>
-          <p:cNvPr id="12" name="Picture 11" descr="A screenshot of a computer&#10;&#10;AI-generated content may be incorrect.">
-            <a:extLst>
-              <a:ext uri="{FF2B5EF4-FFF2-40B4-BE49-F238E27FC236}">
-                <a16:creationId xmlns:a16="http://schemas.microsoft.com/office/drawing/2014/main" id="{E4E3C7D1-E55D-91CD-D9A7-93D069647CA9}"/>
+                <a16:creationId xmlns:a16="http://schemas.microsoft.com/office/drawing/2014/main" id="{E8151947-AC74-7B92-98C1-6EB7B51FDF22}"/>
               </a:ext>
             </a:extLst>
           </p:cNvPr>
@@ -31856,68 +34147,8 @@
         </p:blipFill>
         <p:spPr>
           <a:xfrm>
-            <a:off x="5916914" y="2853272"/>
-            <a:ext cx="5402390" cy="1112257"/>
-          </a:xfrm>
-          <a:prstGeom prst="rect">
-            <a:avLst/>
-          </a:prstGeom>
-        </p:spPr>
-      </p:pic>
-      <p:pic>
-        <p:nvPicPr>
-          <p:cNvPr id="10" name="Picture 9" descr="A screenshot of a calculator&#10;&#10;AI-generated content may be incorrect.">
-            <a:extLst>
-              <a:ext uri="{FF2B5EF4-FFF2-40B4-BE49-F238E27FC236}">
-                <a16:creationId xmlns:a16="http://schemas.microsoft.com/office/drawing/2014/main" id="{473D6F7E-895D-9511-C065-46F7EE8C50FD}"/>
-              </a:ext>
-            </a:extLst>
-          </p:cNvPr>
-          <p:cNvPicPr>
-            <a:picLocks noChangeAspect="1"/>
-          </p:cNvPicPr>
-          <p:nvPr/>
-        </p:nvPicPr>
-        <p:blipFill>
-          <a:blip r:embed="rId4"/>
-          <a:stretch>
-            <a:fillRect/>
-          </a:stretch>
-        </p:blipFill>
-        <p:spPr>
-          <a:xfrm>
-            <a:off x="5916925" y="4061383"/>
-            <a:ext cx="5307609" cy="1112257"/>
-          </a:xfrm>
-          <a:prstGeom prst="rect">
-            <a:avLst/>
-          </a:prstGeom>
-        </p:spPr>
-      </p:pic>
-      <p:pic>
-        <p:nvPicPr>
-          <p:cNvPr id="13" name="Picture 12" descr="A white grid with black numbers&#10;&#10;AI-generated content may be incorrect.">
-            <a:extLst>
-              <a:ext uri="{FF2B5EF4-FFF2-40B4-BE49-F238E27FC236}">
-                <a16:creationId xmlns:a16="http://schemas.microsoft.com/office/drawing/2014/main" id="{DB02D4D4-0A47-871D-F74A-E641FAC9A1DC}"/>
-              </a:ext>
-            </a:extLst>
-          </p:cNvPr>
-          <p:cNvPicPr>
-            <a:picLocks noChangeAspect="1"/>
-          </p:cNvPicPr>
-          <p:nvPr/>
-        </p:nvPicPr>
-        <p:blipFill>
-          <a:blip r:embed="rId5"/>
-          <a:stretch>
-            <a:fillRect/>
-          </a:stretch>
-        </p:blipFill>
-        <p:spPr>
-          <a:xfrm>
-            <a:off x="5916925" y="5269493"/>
-            <a:ext cx="5412321" cy="1112257"/>
+            <a:off x="6345165" y="2292573"/>
+            <a:ext cx="5131087" cy="3848315"/>
           </a:xfrm>
           <a:prstGeom prst="rect">
             <a:avLst/>
@@ -31927,7 +34158,7 @@
     </p:spTree>
     <p:extLst>
       <p:ext uri="{BB962C8B-B14F-4D97-AF65-F5344CB8AC3E}">
-        <p14:creationId xmlns:p14="http://schemas.microsoft.com/office/powerpoint/2010/main" val="2056095916"/>
+        <p14:creationId xmlns:p14="http://schemas.microsoft.com/office/powerpoint/2010/main" val="1055453534"/>
       </p:ext>
     </p:extLst>
   </p:cSld>
@@ -32216,4 +34447,299 @@
     </a:ext>
   </a:extLst>
 </a:theme>
+</file>
+
+<file path=ppt/theme/theme2.xml><?xml version="1.0" encoding="utf-8"?>
+<a:theme xmlns:a="http://schemas.openxmlformats.org/drawingml/2006/main" name="Office Theme">
+  <a:themeElements>
+    <a:clrScheme name="Office">
+      <a:dk1>
+        <a:sysClr val="windowText" lastClr="000000"/>
+      </a:dk1>
+      <a:lt1>
+        <a:sysClr val="window" lastClr="FFFFFF"/>
+      </a:lt1>
+      <a:dk2>
+        <a:srgbClr val="44546A"/>
+      </a:dk2>
+      <a:lt2>
+        <a:srgbClr val="E7E6E6"/>
+      </a:lt2>
+      <a:accent1>
+        <a:srgbClr val="4472C4"/>
+      </a:accent1>
+      <a:accent2>
+        <a:srgbClr val="ED7D31"/>
+      </a:accent2>
+      <a:accent3>
+        <a:srgbClr val="A5A5A5"/>
+      </a:accent3>
+      <a:accent4>
+        <a:srgbClr val="FFC000"/>
+      </a:accent4>
+      <a:accent5>
+        <a:srgbClr val="5B9BD5"/>
+      </a:accent5>
+      <a:accent6>
+        <a:srgbClr val="70AD47"/>
+      </a:accent6>
+      <a:hlink>
+        <a:srgbClr val="0563C1"/>
+      </a:hlink>
+      <a:folHlink>
+        <a:srgbClr val="954F72"/>
+      </a:folHlink>
+    </a:clrScheme>
+    <a:fontScheme name="Office">
+      <a:majorFont>
+        <a:latin typeface="Calibri Light" panose="020F0302020204030204"/>
+        <a:ea typeface=""/>
+        <a:cs typeface=""/>
+        <a:font script="Jpan" typeface="游ゴシック Light"/>
+        <a:font script="Hang" typeface="맑은 고딕"/>
+        <a:font script="Hans" typeface="等线 Light"/>
+        <a:font script="Hant" typeface="新細明體"/>
+        <a:font script="Arab" typeface="Times New Roman"/>
+        <a:font script="Hebr" typeface="Times New Roman"/>
+        <a:font script="Thai" typeface="Angsana New"/>
+        <a:font script="Ethi" typeface="Nyala"/>
+        <a:font script="Beng" typeface="Vrinda"/>
+        <a:font script="Gujr" typeface="Shruti"/>
+        <a:font script="Khmr" typeface="MoolBoran"/>
+        <a:font script="Knda" typeface="Tunga"/>
+        <a:font script="Guru" typeface="Raavi"/>
+        <a:font script="Cans" typeface="Euphemia"/>
+        <a:font script="Cher" typeface="Plantagenet Cherokee"/>
+        <a:font script="Yiii" typeface="Microsoft Yi Baiti"/>
+        <a:font script="Tibt" typeface="Microsoft Himalaya"/>
+        <a:font script="Thaa" typeface="MV Boli"/>
+        <a:font script="Deva" typeface="Mangal"/>
+        <a:font script="Telu" typeface="Gautami"/>
+        <a:font script="Taml" typeface="Latha"/>
+        <a:font script="Syrc" typeface="Estrangelo Edessa"/>
+        <a:font script="Orya" typeface="Kalinga"/>
+        <a:font script="Mlym" typeface="Kartika"/>
+        <a:font script="Laoo" typeface="DokChampa"/>
+        <a:font script="Sinh" typeface="Iskoola Pota"/>
+        <a:font script="Mong" typeface="Mongolian Baiti"/>
+        <a:font script="Viet" typeface="Times New Roman"/>
+        <a:font script="Uigh" typeface="Microsoft Uighur"/>
+        <a:font script="Geor" typeface="Sylfaen"/>
+        <a:font script="Armn" typeface="Arial"/>
+        <a:font script="Bugi" typeface="Leelawadee UI"/>
+        <a:font script="Bopo" typeface="Microsoft JhengHei"/>
+        <a:font script="Java" typeface="Javanese Text"/>
+        <a:font script="Lisu" typeface="Segoe UI"/>
+        <a:font script="Mymr" typeface="Myanmar Text"/>
+        <a:font script="Nkoo" typeface="Ebrima"/>
+        <a:font script="Olck" typeface="Nirmala UI"/>
+        <a:font script="Osma" typeface="Ebrima"/>
+        <a:font script="Phag" typeface="Phagspa"/>
+        <a:font script="Syrn" typeface="Estrangelo Edessa"/>
+        <a:font script="Syrj" typeface="Estrangelo Edessa"/>
+        <a:font script="Syre" typeface="Estrangelo Edessa"/>
+        <a:font script="Sora" typeface="Nirmala UI"/>
+        <a:font script="Tale" typeface="Microsoft Tai Le"/>
+        <a:font script="Talu" typeface="Microsoft New Tai Lue"/>
+        <a:font script="Tfng" typeface="Ebrima"/>
+      </a:majorFont>
+      <a:minorFont>
+        <a:latin typeface="Calibri" panose="020F0502020204030204"/>
+        <a:ea typeface=""/>
+        <a:cs typeface=""/>
+        <a:font script="Jpan" typeface="游ゴシック"/>
+        <a:font script="Hang" typeface="맑은 고딕"/>
+        <a:font script="Hans" typeface="等线"/>
+        <a:font script="Hant" typeface="新細明體"/>
+        <a:font script="Arab" typeface="Arial"/>
+        <a:font script="Hebr" typeface="Arial"/>
+        <a:font script="Thai" typeface="Cordia New"/>
+        <a:font script="Ethi" typeface="Nyala"/>
+        <a:font script="Beng" typeface="Vrinda"/>
+        <a:font script="Gujr" typeface="Shruti"/>
+        <a:font script="Khmr" typeface="DaunPenh"/>
+        <a:font script="Knda" typeface="Tunga"/>
+        <a:font script="Guru" typeface="Raavi"/>
+        <a:font script="Cans" typeface="Euphemia"/>
+        <a:font script="Cher" typeface="Plantagenet Cherokee"/>
+        <a:font script="Yiii" typeface="Microsoft Yi Baiti"/>
+        <a:font script="Tibt" typeface="Microsoft Himalaya"/>
+        <a:font script="Thaa" typeface="MV Boli"/>
+        <a:font script="Deva" typeface="Mangal"/>
+        <a:font script="Telu" typeface="Gautami"/>
+        <a:font script="Taml" typeface="Latha"/>
+        <a:font script="Syrc" typeface="Estrangelo Edessa"/>
+        <a:font script="Orya" typeface="Kalinga"/>
+        <a:font script="Mlym" typeface="Kartika"/>
+        <a:font script="Laoo" typeface="DokChampa"/>
+        <a:font script="Sinh" typeface="Iskoola Pota"/>
+        <a:font script="Mong" typeface="Mongolian Baiti"/>
+        <a:font script="Viet" typeface="Arial"/>
+        <a:font script="Uigh" typeface="Microsoft Uighur"/>
+        <a:font script="Geor" typeface="Sylfaen"/>
+        <a:font script="Armn" typeface="Arial"/>
+        <a:font script="Bugi" typeface="Leelawadee UI"/>
+        <a:font script="Bopo" typeface="Microsoft JhengHei"/>
+        <a:font script="Java" typeface="Javanese Text"/>
+        <a:font script="Lisu" typeface="Segoe UI"/>
+        <a:font script="Mymr" typeface="Myanmar Text"/>
+        <a:font script="Nkoo" typeface="Ebrima"/>
+        <a:font script="Olck" typeface="Nirmala UI"/>
+        <a:font script="Osma" typeface="Ebrima"/>
+        <a:font script="Phag" typeface="Phagspa"/>
+        <a:font script="Syrn" typeface="Estrangelo Edessa"/>
+        <a:font script="Syrj" typeface="Estrangelo Edessa"/>
+        <a:font script="Syre" typeface="Estrangelo Edessa"/>
+        <a:font script="Sora" typeface="Nirmala UI"/>
+        <a:font script="Tale" typeface="Microsoft Tai Le"/>
+        <a:font script="Talu" typeface="Microsoft New Tai Lue"/>
+        <a:font script="Tfng" typeface="Ebrima"/>
+      </a:minorFont>
+    </a:fontScheme>
+    <a:fmtScheme name="Office">
+      <a:fillStyleLst>
+        <a:solidFill>
+          <a:schemeClr val="phClr"/>
+        </a:solidFill>
+        <a:gradFill rotWithShape="1">
+          <a:gsLst>
+            <a:gs pos="0">
+              <a:schemeClr val="phClr">
+                <a:lumMod val="110000"/>
+                <a:satMod val="105000"/>
+                <a:tint val="67000"/>
+              </a:schemeClr>
+            </a:gs>
+            <a:gs pos="50000">
+              <a:schemeClr val="phClr">
+                <a:lumMod val="105000"/>
+                <a:satMod val="103000"/>
+                <a:tint val="73000"/>
+              </a:schemeClr>
+            </a:gs>
+            <a:gs pos="100000">
+              <a:schemeClr val="phClr">
+                <a:lumMod val="105000"/>
+                <a:satMod val="109000"/>
+                <a:tint val="81000"/>
+              </a:schemeClr>
+            </a:gs>
+          </a:gsLst>
+          <a:lin ang="5400000" scaled="0"/>
+        </a:gradFill>
+        <a:gradFill rotWithShape="1">
+          <a:gsLst>
+            <a:gs pos="0">
+              <a:schemeClr val="phClr">
+                <a:satMod val="103000"/>
+                <a:lumMod val="102000"/>
+                <a:tint val="94000"/>
+              </a:schemeClr>
+            </a:gs>
+            <a:gs pos="50000">
+              <a:schemeClr val="phClr">
+                <a:satMod val="110000"/>
+                <a:lumMod val="100000"/>
+                <a:shade val="100000"/>
+              </a:schemeClr>
+            </a:gs>
+            <a:gs pos="100000">
+              <a:schemeClr val="phClr">
+                <a:lumMod val="99000"/>
+                <a:satMod val="120000"/>
+                <a:shade val="78000"/>
+              </a:schemeClr>
+            </a:gs>
+          </a:gsLst>
+          <a:lin ang="5400000" scaled="0"/>
+        </a:gradFill>
+      </a:fillStyleLst>
+      <a:lnStyleLst>
+        <a:ln w="6350" cap="flat" cmpd="sng" algn="ctr">
+          <a:solidFill>
+            <a:schemeClr val="phClr"/>
+          </a:solidFill>
+          <a:prstDash val="solid"/>
+          <a:miter lim="800000"/>
+        </a:ln>
+        <a:ln w="12700" cap="flat" cmpd="sng" algn="ctr">
+          <a:solidFill>
+            <a:schemeClr val="phClr"/>
+          </a:solidFill>
+          <a:prstDash val="solid"/>
+          <a:miter lim="800000"/>
+        </a:ln>
+        <a:ln w="19050" cap="flat" cmpd="sng" algn="ctr">
+          <a:solidFill>
+            <a:schemeClr val="phClr"/>
+          </a:solidFill>
+          <a:prstDash val="solid"/>
+          <a:miter lim="800000"/>
+        </a:ln>
+      </a:lnStyleLst>
+      <a:effectStyleLst>
+        <a:effectStyle>
+          <a:effectLst/>
+        </a:effectStyle>
+        <a:effectStyle>
+          <a:effectLst/>
+        </a:effectStyle>
+        <a:effectStyle>
+          <a:effectLst>
+            <a:outerShdw blurRad="57150" dist="19050" dir="5400000" algn="ctr" rotWithShape="0">
+              <a:srgbClr val="000000">
+                <a:alpha val="63000"/>
+              </a:srgbClr>
+            </a:outerShdw>
+          </a:effectLst>
+        </a:effectStyle>
+      </a:effectStyleLst>
+      <a:bgFillStyleLst>
+        <a:solidFill>
+          <a:schemeClr val="phClr"/>
+        </a:solidFill>
+        <a:solidFill>
+          <a:schemeClr val="phClr">
+            <a:tint val="95000"/>
+            <a:satMod val="170000"/>
+          </a:schemeClr>
+        </a:solidFill>
+        <a:gradFill rotWithShape="1">
+          <a:gsLst>
+            <a:gs pos="0">
+              <a:schemeClr val="phClr">
+                <a:tint val="93000"/>
+                <a:satMod val="150000"/>
+                <a:shade val="98000"/>
+                <a:lumMod val="102000"/>
+              </a:schemeClr>
+            </a:gs>
+            <a:gs pos="50000">
+              <a:schemeClr val="phClr">
+                <a:tint val="98000"/>
+                <a:satMod val="130000"/>
+                <a:shade val="90000"/>
+                <a:lumMod val="103000"/>
+              </a:schemeClr>
+            </a:gs>
+            <a:gs pos="100000">
+              <a:schemeClr val="phClr">
+                <a:shade val="63000"/>
+                <a:satMod val="120000"/>
+              </a:schemeClr>
+            </a:gs>
+          </a:gsLst>
+          <a:lin ang="5400000" scaled="0"/>
+        </a:gradFill>
+      </a:bgFillStyleLst>
+    </a:fmtScheme>
+  </a:themeElements>
+  <a:objectDefaults/>
+  <a:extraClrSchemeLst/>
+  <a:extLst>
+    <a:ext uri="{05A4C25C-085E-4340-85A3-A5531E510DB2}">
+      <thm15:themeFamily xmlns:thm15="http://schemas.microsoft.com/office/thememl/2012/main" name="Office Theme" id="{62F939B6-93AF-4DB8-9C6B-D6C7DFDC589F}" vid="{4A3C46E8-61CC-4603-A589-7422A47A8E4A}"/>
+    </a:ext>
+  </a:extLst>
+</a:theme>
 </file>